--- a/public/SmartRoute_Presentation.pptx
+++ b/public/SmartRoute_Presentation.pptx
@@ -3114,7 +3114,7 @@
       <p:grpSpPr/>
       <p:pic>
         <p:nvPicPr>
-          <p:cNvPr id="2" name="Picture 1" descr="gradient_cover_banner.png"/>
+          <p:cNvPr id="2" name="Picture 1" descr="hero_cover_banner.png"/>
           <p:cNvPicPr>
             <a:picLocks noChangeAspect="1"/>
           </p:cNvPicPr>
@@ -3128,8 +3128,8 @@
         </p:blipFill>
         <p:spPr>
           <a:xfrm>
-            <a:off x="731520" y="502920"/>
-            <a:ext cx="10728655" cy="2926080"/>
+            <a:off x="731520" y="457200"/>
+            <a:ext cx="10728655" cy="3017520"/>
           </a:xfrm>
           <a:prstGeom prst="rect">
             <a:avLst/>
@@ -3145,7 +3145,7 @@
         <p:spPr>
           <a:xfrm>
             <a:off x="731520" y="3703320"/>
-            <a:ext cx="10728655" cy="1097280"/>
+            <a:ext cx="10728655" cy="914400"/>
           </a:xfrm>
           <a:prstGeom prst="rect">
             <a:avLst/>
@@ -3159,7 +3159,7 @@
           <a:lstStyle/>
           <a:p>
             <a:pPr>
-              <a:defRPr sz="4200" b="1">
+              <a:defRPr sz="4000" b="1">
                 <a:solidFill>
                   <a:srgbClr val="241C1C"/>
                 </a:solidFill>
@@ -3180,8 +3180,8 @@
         </p:nvSpPr>
         <p:spPr>
           <a:xfrm>
-            <a:off x="731520" y="4892040"/>
-            <a:ext cx="6217920" cy="347472"/>
+            <a:off x="731520" y="4709160"/>
+            <a:ext cx="6583680" cy="384048"/>
           </a:xfrm>
           <a:prstGeom prst="roundRect">
             <a:avLst/>
@@ -3208,11 +3208,11 @@
           </a:fontRef>
         </p:style>
         <p:txBody>
-          <a:bodyPr rtlCol="0" anchor="ctr" wrap="none" lIns="109728" rIns="109728" tIns="36576" bIns="36576"/>
+          <a:bodyPr rtlCol="0" anchor="ctr" wrap="none" lIns="128016" rIns="128016" tIns="36576" bIns="36576"/>
           <a:lstStyle/>
           <a:p>
             <a:pPr algn="ctr">
-              <a:defRPr sz="1000" b="1">
+              <a:defRPr sz="1100" b="1">
                 <a:solidFill>
                   <a:srgbClr val="FFFFFF"/>
                 </a:solidFill>
@@ -3233,7 +3233,7 @@
         </p:nvSpPr>
         <p:spPr>
           <a:xfrm>
-            <a:off x="731520" y="5349240"/>
+            <a:off x="731520" y="5212080"/>
             <a:ext cx="10698480" cy="457200"/>
           </a:xfrm>
           <a:prstGeom prst="rect">
@@ -3248,15 +3248,15 @@
           <a:lstStyle/>
           <a:p>
             <a:pPr>
-              <a:defRPr sz="1150" b="1">
-                <a:solidFill>
-                  <a:srgbClr val="736964"/>
-                </a:solidFill>
-                <a:latin typeface="Inter"/>
-              </a:defRPr>
-            </a:pPr>
-            <a:r>
-              <a:t>KNAPSACK DYNAMIC PROGRAMMING  •  GREEDY HEURISTICS  •  DIJKSTRA'S ALGORITHM  •  BELLMAN-FORD</a:t>
+              <a:defRPr sz="1300" b="1">
+                <a:solidFill>
+                  <a:srgbClr val="E85923"/>
+                </a:solidFill>
+                <a:latin typeface="Inter"/>
+              </a:defRPr>
+            </a:pPr>
+            <a:r>
+              <a:t>0/1 KNAPSACK (DP)  •  GREEDY HEURISTICS  •  DIJKSTRA'S SSSP  •  BELLMAN-FORD</a:t>
             </a:r>
           </a:p>
         </p:txBody>
@@ -3269,7 +3269,7 @@
         </p:nvSpPr>
         <p:spPr>
           <a:xfrm>
-            <a:off x="731520" y="5897880"/>
+            <a:off x="731520" y="5806440"/>
             <a:ext cx="10698480" cy="548640"/>
           </a:xfrm>
           <a:prstGeom prst="rect">
@@ -3284,7 +3284,7 @@
           <a:lstStyle/>
           <a:p>
             <a:pPr>
-              <a:defRPr sz="1000">
+              <a:defRPr sz="1100">
                 <a:solidFill>
                   <a:srgbClr val="241C1C"/>
                 </a:solidFill>
@@ -3332,7 +3332,7 @@
         <p:spPr>
           <a:xfrm>
             <a:off x="731520" y="548640"/>
-            <a:ext cx="2560320" cy="347472"/>
+            <a:ext cx="2743200" cy="384048"/>
           </a:xfrm>
           <a:prstGeom prst="roundRect">
             <a:avLst/>
@@ -3359,11 +3359,11 @@
           </a:fontRef>
         </p:style>
         <p:txBody>
-          <a:bodyPr rtlCol="0" anchor="ctr" wrap="none" lIns="109728" rIns="109728" tIns="36576" bIns="36576"/>
+          <a:bodyPr rtlCol="0" anchor="ctr" wrap="none" lIns="128016" rIns="128016" tIns="36576" bIns="36576"/>
           <a:lstStyle/>
           <a:p>
             <a:pPr algn="ctr">
-              <a:defRPr sz="950" b="1">
+              <a:defRPr sz="1100" b="1">
                 <a:solidFill>
                   <a:srgbClr val="FFFFFF"/>
                 </a:solidFill>
@@ -3420,8 +3420,8 @@
         </p:nvSpPr>
         <p:spPr>
           <a:xfrm>
-            <a:off x="731520" y="1828800"/>
-            <a:ext cx="3328416" cy="4389120"/>
+            <a:off x="731520" y="1737360"/>
+            <a:ext cx="3328416" cy="4572000"/>
           </a:xfrm>
           <a:prstGeom prst="roundRect">
             <a:avLst/>
@@ -3454,20 +3454,20 @@
           <a:lstStyle/>
           <a:p>
             <a:pPr algn="ctr">
-              <a:defRPr sz="1400" b="1">
+              <a:defRPr sz="1500" b="1">
                 <a:solidFill>
                   <a:srgbClr val="241C1C"/>
                 </a:solidFill>
-                <a:latin typeface="The Seasons"/>
-              </a:defRPr>
-            </a:pPr>
-            <a:r>
-              <a:t>DIJKSTRA'S ALGORITHM</a:t>
-            </a:r>
-          </a:p>
-          <a:p>
-            <a:pPr>
-              <a:defRPr sz="900" b="1">
+                <a:latin typeface="Inter"/>
+              </a:defRPr>
+            </a:pPr>
+            <a:r>
+              <a:t>DIJKSTRA'S SSSP</a:t>
+            </a:r>
+          </a:p>
+          <a:p>
+            <a:pPr>
+              <a:defRPr sz="1100" b="1">
                 <a:solidFill>
                   <a:srgbClr val="E85923"/>
                 </a:solidFill>
@@ -3475,12 +3475,13 @@
               </a:defRPr>
             </a:pPr>
             <a:r>
-              <a:t>MIN-HEAP GREEDY • O((V+E) LOG V)</a:t>
-            </a:r>
-          </a:p>
-          <a:p>
-            <a:pPr>
-              <a:defRPr sz="1000">
+              <a:t>MIN-HEAP GREEDY • O((V+E)logV)</a:t>
+            </a:r>
+          </a:p>
+          <a:p>
+            <a:br/>
+            <a:pPr>
+              <a:defRPr sz="1200">
                 <a:solidFill>
                   <a:srgbClr val="241C1C"/>
                 </a:solidFill>
@@ -3500,11 +3501,11 @@
             </a:r>
             <a:br/>
             <a:r>
-              <a:t>• Invariant: Greedily extract vertex u with minimum tentative distance. It is permanently finalized.</a:t>
+              <a:t>• Invariant: Extract vertex u with minimum tentative distance. It is permanently finalized.</a:t>
             </a:r>
             <a:br/>
             <a:r>
-              <a:t>• Relax adjacent edges:</a:t>
+              <a:t>• Edge Relaxation:</a:t>
             </a:r>
             <a:br/>
             <a:r>
@@ -3513,7 +3514,7 @@
             <a:br/>
             <a:br/>
             <a:r>
-              <a:t>Limitation: Requires w(u,v) &gt;= 0. Cannot handle negative toll rebates or congestion credits.</a:t>
+              <a:t>Limitation: Requires w(u,v) &gt;= 0. Cannot handle negative toll credits.</a:t>
             </a:r>
           </a:p>
         </p:txBody>
@@ -3526,8 +3527,8 @@
         </p:nvSpPr>
         <p:spPr>
           <a:xfrm>
-            <a:off x="4425696" y="1828800"/>
-            <a:ext cx="3328416" cy="4389120"/>
+            <a:off x="4425696" y="1737360"/>
+            <a:ext cx="3328416" cy="4572000"/>
           </a:xfrm>
           <a:prstGeom prst="roundRect">
             <a:avLst/>
@@ -3560,11 +3561,11 @@
           <a:lstStyle/>
           <a:p>
             <a:pPr algn="ctr">
-              <a:defRPr sz="1400" b="1">
+              <a:defRPr sz="1500" b="1">
                 <a:solidFill>
                   <a:srgbClr val="241C1C"/>
                 </a:solidFill>
-                <a:latin typeface="The Seasons"/>
+                <a:latin typeface="Inter"/>
               </a:defRPr>
             </a:pPr>
             <a:r>
@@ -3573,7 +3574,7 @@
           </a:p>
           <a:p>
             <a:pPr>
-              <a:defRPr sz="900" b="1">
+              <a:defRPr sz="1100" b="1">
                 <a:solidFill>
                   <a:srgbClr val="E85923"/>
                 </a:solidFill>
@@ -3585,8 +3586,9 @@
             </a:r>
           </a:p>
           <a:p>
-            <a:pPr>
-              <a:defRPr sz="1000">
+            <a:br/>
+            <a:pPr>
+              <a:defRPr sz="1200">
                 <a:solidFill>
                   <a:srgbClr val="241C1C"/>
                 </a:solidFill>
@@ -3602,7 +3604,7 @@
             </a:r>
             <a:br/>
             <a:r>
-              <a:t>  d^(k)[v] = min_{(u,v)} (d^(k-1)[v], d^(k-1)[u] + w(u,v))</a:t>
+              <a:t>  d^(k)[v] = min(d^(k-1)[v], d^(k-1)[u] + w(u,v))</a:t>
             </a:r>
             <a:br/>
             <a:br/>
@@ -3611,12 +3613,12 @@
             </a:r>
             <a:br/>
             <a:r>
-              <a:t>  If edge (u,v) relaxes on pass |V|, graph contains a negative-weight cycle.</a:t>
+              <a:t>  If edge (u,v) relaxes on iteration |V|, a negative-weight cycle exists.</a:t>
             </a:r>
             <a:br/>
             <a:br/>
             <a:r>
-              <a:t>Benefit: Handles dynamic penalty adjustments and toll rebates without algorithmic failure.</a:t>
+              <a:t>Benefit: Handles dynamic congestion penalties &amp; toll subsidies without failure.</a:t>
             </a:r>
           </a:p>
         </p:txBody>
@@ -3629,8 +3631,8 @@
         </p:nvSpPr>
         <p:spPr>
           <a:xfrm>
-            <a:off x="8119872" y="1828800"/>
-            <a:ext cx="3328416" cy="4389120"/>
+            <a:off x="8119872" y="1737360"/>
+            <a:ext cx="3328416" cy="4572000"/>
           </a:xfrm>
           <a:prstGeom prst="roundRect">
             <a:avLst/>
@@ -3663,11 +3665,11 @@
           <a:lstStyle/>
           <a:p>
             <a:pPr algn="ctr">
-              <a:defRPr sz="1400" b="1">
+              <a:defRPr sz="1500" b="1">
                 <a:solidFill>
                   <a:srgbClr val="241C1C"/>
                 </a:solidFill>
-                <a:latin typeface="The Seasons"/>
+                <a:latin typeface="Inter"/>
               </a:defRPr>
             </a:pPr>
             <a:r>
@@ -3676,7 +3678,7 @@
           </a:p>
           <a:p>
             <a:pPr>
-              <a:defRPr sz="900" b="1">
+              <a:defRPr sz="1100" b="1">
                 <a:solidFill>
                   <a:srgbClr val="E85923"/>
                 </a:solidFill>
@@ -3688,8 +3690,9 @@
             </a:r>
           </a:p>
           <a:p>
-            <a:pPr>
-              <a:defRPr sz="1000">
+            <a:br/>
+            <a:pPr>
+              <a:defRPr sz="1200">
                 <a:solidFill>
                   <a:srgbClr val="241C1C"/>
                 </a:solidFill>
@@ -3702,17 +3705,17 @@
             <a:br/>
             <a:br/>
             <a:r>
-              <a:t>• Primary Real-Time Routing: Dijkstra executes in 4.2 ms across Hyderabad corridors for instant turn-by-turn directions.</a:t>
+              <a:t>• Primary Navigation: Dijkstra executes in 4.2 ms across Hyderabad corridors for instant turn-by-turn directions.</a:t>
             </a:r>
             <a:br/>
             <a:br/>
             <a:r>
-              <a:t>• Congestion &amp; Integrity Audit: Bellman-Ford runs in background (18.7 ms) to detect traffic deadlock loops and model dynamic incentive subsidies.</a:t>
+              <a:t>• Congestion Audit: Bellman-Ford runs in background (18.7 ms) to detect traffic deadlock loops and model dynamic subsidies.</a:t>
             </a:r>
             <a:br/>
             <a:br/>
             <a:r>
-              <a:t>• Viva Takeaway: Demonstrates deep mastery of both Greedy &amp; DP shortest-path paradigms.</a:t>
+              <a:t>• Faculty Viva Defense: Demonstrates mastery of both Greedy &amp; DP shortest paths.</a:t>
             </a:r>
           </a:p>
         </p:txBody>
@@ -3745,7 +3748,7 @@
       <p:grpSpPr/>
       <p:pic>
         <p:nvPicPr>
-          <p:cNvPr id="2" name="Picture 1" descr="gradient_vertical_magenta.png"/>
+          <p:cNvPr id="2" name="Picture 1" descr="system_architecture_visual.png"/>
           <p:cNvPicPr>
             <a:picLocks noChangeAspect="1"/>
           </p:cNvPicPr>
@@ -3759,8 +3762,8 @@
         </p:blipFill>
         <p:spPr>
           <a:xfrm>
-            <a:off x="731520" y="685800"/>
-            <a:ext cx="3840480" cy="5486400"/>
+            <a:off x="731520" y="594360"/>
+            <a:ext cx="4114800" cy="5623560"/>
           </a:xfrm>
           <a:prstGeom prst="rect">
             <a:avLst/>
@@ -3775,8 +3778,8 @@
         </p:nvSpPr>
         <p:spPr>
           <a:xfrm>
-            <a:off x="5029200" y="685800"/>
-            <a:ext cx="2286000" cy="347472"/>
+            <a:off x="5212080" y="594360"/>
+            <a:ext cx="2560320" cy="384048"/>
           </a:xfrm>
           <a:prstGeom prst="roundRect">
             <a:avLst/>
@@ -3803,11 +3806,11 @@
           </a:fontRef>
         </p:style>
         <p:txBody>
-          <a:bodyPr rtlCol="0" anchor="ctr" wrap="none" lIns="109728" rIns="109728" tIns="36576" bIns="36576"/>
+          <a:bodyPr rtlCol="0" anchor="ctr" wrap="none" lIns="128016" rIns="128016" tIns="36576" bIns="36576"/>
           <a:lstStyle/>
           <a:p>
             <a:pPr algn="ctr">
-              <a:defRPr sz="950" b="1">
+              <a:defRPr sz="1100" b="1">
                 <a:solidFill>
                   <a:srgbClr val="FFFFFF"/>
                 </a:solidFill>
@@ -3828,8 +3831,8 @@
         </p:nvSpPr>
         <p:spPr>
           <a:xfrm>
-            <a:off x="5029200" y="1234440"/>
-            <a:ext cx="6400800" cy="1280160"/>
+            <a:off x="5212080" y="1051560"/>
+            <a:ext cx="6217920" cy="914400"/>
           </a:xfrm>
           <a:prstGeom prst="rect">
             <a:avLst/>
@@ -3843,7 +3846,7 @@
           <a:lstStyle/>
           <a:p>
             <a:pPr>
-              <a:defRPr sz="3600" b="1">
+              <a:defRPr sz="3200" b="1">
                 <a:solidFill>
                   <a:srgbClr val="241C1C"/>
                 </a:solidFill>
@@ -3851,11 +3854,7 @@
               </a:defRPr>
             </a:pPr>
             <a:r>
-              <a:t>SMARTROUTE DUAL-ENGINE</a:t>
-            </a:r>
-            <a:br/>
-            <a:r>
-              <a:t>SYSTEM ARCHITECTURE</a:t>
+              <a:t>SMARTROUTE DUAL-ENGINE ARCHITECTURE</a:t>
             </a:r>
           </a:p>
         </p:txBody>
@@ -3868,8 +3867,8 @@
         </p:nvSpPr>
         <p:spPr>
           <a:xfrm>
-            <a:off x="5029200" y="2651760"/>
-            <a:ext cx="6400800" cy="3657600"/>
+            <a:off x="5212080" y="2011680"/>
+            <a:ext cx="6217920" cy="4206240"/>
           </a:xfrm>
           <a:prstGeom prst="rect">
             <a:avLst/>
@@ -3883,7 +3882,21 @@
           <a:lstStyle/>
           <a:p>
             <a:pPr>
-              <a:defRPr sz="1200" b="1">
+              <a:defRPr sz="1400" b="1">
+                <a:solidFill>
+                  <a:srgbClr val="E85923"/>
+                </a:solidFill>
+                <a:latin typeface="Inter"/>
+              </a:defRPr>
+            </a:pPr>
+            <a:r>
+              <a:t>INTEGRATING DAA THEORY WITH ENTERPRISE SOFTWARE:</a:t>
+            </a:r>
+          </a:p>
+          <a:p>
+            <a:br/>
+            <a:pPr>
+              <a:defRPr sz="1300" b="1">
                 <a:solidFill>
                   <a:srgbClr val="241C1C"/>
                 </a:solidFill>
@@ -3891,25 +3904,26 @@
               </a:defRPr>
             </a:pPr>
             <a:r>
-              <a:t>AN INTEGRATED FULL-STACK PLATFORM COMBINING RIGOROUS DAA ENGINES WITH PRODUCTION-GRADE OPERATIONAL VISUALIZATION:</a:t>
-            </a:r>
-          </a:p>
-          <a:p>
-            <a:pPr>
-              <a:defRPr sz="1100" b="1">
-                <a:solidFill>
-                  <a:srgbClr val="E85923"/>
-                </a:solidFill>
-                <a:latin typeface="Inter"/>
-              </a:defRPr>
-            </a:pPr>
-            <a:r>
-              <a:t>1. Packing Engine (Knapsack DP &amp; Greedy Comparator):</a:t>
-            </a:r>
-          </a:p>
-          <a:p>
-            <a:pPr>
-              <a:defRPr sz="1000">
+              <a:t>1. Cargo Packing Engine (Knapsack DP):</a:t>
+            </a:r>
+          </a:p>
+          <a:p>
+            <a:pPr>
+              <a:defRPr sz="1200">
+                <a:solidFill>
+                  <a:srgbClr val="645A55"/>
+                </a:solidFill>
+                <a:latin typeface="Inter"/>
+              </a:defRPr>
+            </a:pPr>
+            <a:r>
+              <a:t>Solves 0/1 Knapsack to select optimal parcel subsets under vehicle limits. Evaluates heuristic comparators (Profit Density, EDF) in parallel.</a:t>
+            </a:r>
+          </a:p>
+          <a:p>
+            <a:br/>
+            <a:pPr>
+              <a:defRPr sz="1300" b="1">
                 <a:solidFill>
                   <a:srgbClr val="241C1C"/>
                 </a:solidFill>
@@ -3917,25 +3931,26 @@
               </a:defRPr>
             </a:pPr>
             <a:r>
-              <a:t>Accepts live customer parcel orders, verifies driver vehicle weight constraints, and solves the 0/1 Knapsack problem in real-time alongside Profit Density, Max Profit, and EDF heuristics.</a:t>
-            </a:r>
-          </a:p>
-          <a:p>
-            <a:pPr>
-              <a:defRPr sz="1100" b="1">
-                <a:solidFill>
-                  <a:srgbClr val="E85923"/>
-                </a:solidFill>
-                <a:latin typeface="Inter"/>
-              </a:defRPr>
-            </a:pPr>
-            <a:r>
-              <a:t>2. Routing Engine (Dijkstra Min-Heap &amp; Hyderabad Graph):</a:t>
-            </a:r>
-          </a:p>
-          <a:p>
-            <a:pPr>
-              <a:defRPr sz="1000">
+              <a:t>2. Spatial Routing Engine (Dijkstra Min-Heap):</a:t>
+            </a:r>
+          </a:p>
+          <a:p>
+            <a:pPr>
+              <a:defRPr sz="1200">
+                <a:solidFill>
+                  <a:srgbClr val="645A55"/>
+                </a:solidFill>
+                <a:latin typeface="Inter"/>
+              </a:defRPr>
+            </a:pPr>
+            <a:r>
+              <a:t>Maintains the Hyderabad road network. Computes shortest turn-by-turn waypoint sequences from Begumpet Hub in 4.2 ms.</a:t>
+            </a:r>
+          </a:p>
+          <a:p>
+            <a:br/>
+            <a:pPr>
+              <a:defRPr sz="1300" b="1">
                 <a:solidFill>
                   <a:srgbClr val="241C1C"/>
                 </a:solidFill>
@@ -3943,25 +3958,26 @@
               </a:defRPr>
             </a:pPr>
             <a:r>
-              <a:t>Maintains the Hyderabad road network adjacency list centered at Begumpet Hub. Calculates exact minimum travel distance, waypoint sequences, and transit durations.</a:t>
-            </a:r>
-          </a:p>
-          <a:p>
-            <a:pPr>
-              <a:defRPr sz="1100" b="1">
-                <a:solidFill>
-                  <a:srgbClr val="E85923"/>
-                </a:solidFill>
-                <a:latin typeface="Inter"/>
-              </a:defRPr>
-            </a:pPr>
-            <a:r>
-              <a:t>3. Verification Engine (Bellman-Ford Congestion Auditor):</a:t>
-            </a:r>
-          </a:p>
-          <a:p>
-            <a:pPr>
-              <a:defRPr sz="1000">
+              <a:t>3. Congestion &amp; Penalty Auditor (Bellman-Ford):</a:t>
+            </a:r>
+          </a:p>
+          <a:p>
+            <a:pPr>
+              <a:defRPr sz="1200">
+                <a:solidFill>
+                  <a:srgbClr val="645A55"/>
+                </a:solidFill>
+                <a:latin typeface="Inter"/>
+              </a:defRPr>
+            </a:pPr>
+            <a:r>
+              <a:t>Validates route stability against dynamic toll surcharges, congestion credits, and negative loops.</a:t>
+            </a:r>
+          </a:p>
+          <a:p>
+            <a:br/>
+            <a:pPr>
+              <a:defRPr sz="1300" b="1">
                 <a:solidFill>
                   <a:srgbClr val="241C1C"/>
                 </a:solidFill>
@@ -3969,33 +3985,20 @@
               </a:defRPr>
             </a:pPr>
             <a:r>
-              <a:t>Audits transit routes against dynamic toll penalties, green corridor subsidies, and negative congestion cycles to guarantee route stability.</a:t>
-            </a:r>
-          </a:p>
-          <a:p>
-            <a:pPr>
-              <a:defRPr sz="1100" b="1">
-                <a:solidFill>
-                  <a:srgbClr val="E85923"/>
-                </a:solidFill>
-                <a:latin typeface="Inter"/>
-              </a:defRPr>
-            </a:pPr>
-            <a:r>
-              <a:t>4. Operations UI (Google Maps &amp; Educational Algorithm Labs):</a:t>
-            </a:r>
-          </a:p>
-          <a:p>
-            <a:pPr>
-              <a:defRPr sz="1000">
-                <a:solidFill>
-                  <a:srgbClr val="241C1C"/>
-                </a:solidFill>
-                <a:latin typeface="Inter"/>
-              </a:defRPr>
-            </a:pPr>
-            <a:r>
-              <a:t>Interactive web dashboard with real-time route polylines, 2D DP cell-by-cell inspection, Min-Heap step tracing, and faculty viva cheat sheets.</a:t>
+              <a:t>4. Operations Dashboard &amp; Viva Labs:</a:t>
+            </a:r>
+          </a:p>
+          <a:p>
+            <a:pPr>
+              <a:defRPr sz="1200">
+                <a:solidFill>
+                  <a:srgbClr val="645A55"/>
+                </a:solidFill>
+                <a:latin typeface="Inter"/>
+              </a:defRPr>
+            </a:pPr>
+            <a:r>
+              <a:t>Interactive Google Maps visualization with live Min-Heap step tracer and 2D DP memoization arithmetic inspector.</a:t>
             </a:r>
           </a:p>
         </p:txBody>
@@ -4034,8 +4037,8 @@
         </p:nvSpPr>
         <p:spPr>
           <a:xfrm>
-            <a:off x="731520" y="548640"/>
-            <a:ext cx="3474720" cy="347472"/>
+            <a:off x="731520" y="502920"/>
+            <a:ext cx="3474720" cy="384048"/>
           </a:xfrm>
           <a:prstGeom prst="roundRect">
             <a:avLst/>
@@ -4062,11 +4065,11 @@
           </a:fontRef>
         </p:style>
         <p:txBody>
-          <a:bodyPr rtlCol="0" anchor="ctr" wrap="none" lIns="109728" rIns="109728" tIns="36576" bIns="36576"/>
+          <a:bodyPr rtlCol="0" anchor="ctr" wrap="none" lIns="128016" rIns="128016" tIns="36576" bIns="36576"/>
           <a:lstStyle/>
           <a:p>
             <a:pPr algn="ctr">
-              <a:defRPr sz="950" b="1">
+              <a:defRPr sz="1100" b="1">
                 <a:solidFill>
                   <a:srgbClr val="FFFFFF"/>
                 </a:solidFill>
@@ -4087,8 +4090,8 @@
         </p:nvSpPr>
         <p:spPr>
           <a:xfrm>
-            <a:off x="731520" y="1005840"/>
-            <a:ext cx="10698480" cy="640080"/>
+            <a:off x="731520" y="960120"/>
+            <a:ext cx="10698480" cy="594360"/>
           </a:xfrm>
           <a:prstGeom prst="rect">
             <a:avLst/>
@@ -4123,8 +4126,8 @@
         </p:nvSpPr>
         <p:spPr>
           <a:xfrm>
-            <a:off x="731520" y="1737360"/>
-            <a:ext cx="5212080" cy="4572000"/>
+            <a:off x="731520" y="1645920"/>
+            <a:ext cx="5212080" cy="4663440"/>
           </a:xfrm>
           <a:prstGeom prst="roundRect">
             <a:avLst/>
@@ -4176,8 +4179,8 @@
         </p:blipFill>
         <p:spPr>
           <a:xfrm>
-            <a:off x="914400" y="1920240"/>
-            <a:ext cx="4846320" cy="3108960"/>
+            <a:off x="914400" y="1828800"/>
+            <a:ext cx="4846320" cy="3200400"/>
           </a:xfrm>
           <a:prstGeom prst="rect">
             <a:avLst/>
@@ -4207,11 +4210,11 @@
           <a:lstStyle/>
           <a:p>
             <a:pPr>
-              <a:defRPr sz="1300" b="1">
+              <a:defRPr sz="1400" b="1">
                 <a:solidFill>
                   <a:srgbClr val="241C1C"/>
                 </a:solidFill>
-                <a:latin typeface="The Seasons"/>
+                <a:latin typeface="Inter"/>
               </a:defRPr>
             </a:pPr>
             <a:r>
@@ -4220,15 +4223,15 @@
           </a:p>
           <a:p>
             <a:pPr>
-              <a:defRPr sz="950">
-                <a:solidFill>
-                  <a:srgbClr val="736964"/>
-                </a:solidFill>
-                <a:latin typeface="Inter"/>
-              </a:defRPr>
-            </a:pPr>
-            <a:r>
-              <a:t>Visualizes Begumpet Central Hub, 35+ Hyderabad delivery nodes, vehicle fleet capacity metrics, and active corridor route polylines.</a:t>
+              <a:defRPr sz="1100">
+                <a:solidFill>
+                  <a:srgbClr val="645A55"/>
+                </a:solidFill>
+                <a:latin typeface="Inter"/>
+              </a:defRPr>
+            </a:pPr>
+            <a:r>
+              <a:t>Visualizes Begumpet Central Hub, 35+ delivery nodes across Hyderabad, active corridor routes, and fleet capacity status.</a:t>
             </a:r>
           </a:p>
         </p:txBody>
@@ -4241,8 +4244,8 @@
         </p:nvSpPr>
         <p:spPr>
           <a:xfrm>
-            <a:off x="6217920" y="1737360"/>
-            <a:ext cx="5212080" cy="4572000"/>
+            <a:off x="6217920" y="1645920"/>
+            <a:ext cx="5212080" cy="4663440"/>
           </a:xfrm>
           <a:prstGeom prst="roundRect">
             <a:avLst/>
@@ -4294,8 +4297,8 @@
         </p:blipFill>
         <p:spPr>
           <a:xfrm>
-            <a:off x="6400800" y="1920240"/>
-            <a:ext cx="4846320" cy="3108960"/>
+            <a:off x="6400800" y="1828800"/>
+            <a:ext cx="4846320" cy="3200400"/>
           </a:xfrm>
           <a:prstGeom prst="rect">
             <a:avLst/>
@@ -4325,11 +4328,11 @@
           <a:lstStyle/>
           <a:p>
             <a:pPr>
-              <a:defRPr sz="1300" b="1">
+              <a:defRPr sz="1400" b="1">
                 <a:solidFill>
                   <a:srgbClr val="241C1C"/>
                 </a:solidFill>
-                <a:latin typeface="The Seasons"/>
+                <a:latin typeface="Inter"/>
               </a:defRPr>
             </a:pPr>
             <a:r>
@@ -4338,15 +4341,15 @@
           </a:p>
           <a:p>
             <a:pPr>
-              <a:defRPr sz="950">
-                <a:solidFill>
-                  <a:srgbClr val="736964"/>
-                </a:solidFill>
-                <a:latin typeface="Inter"/>
-              </a:defRPr>
-            </a:pPr>
-            <a:r>
-              <a:t>Manual binary min-heap step-by-step priority queue playback, edge relaxation logging, and pedagogical viva explanations.</a:t>
+              <a:defRPr sz="1100">
+                <a:solidFill>
+                  <a:srgbClr val="645A55"/>
+                </a:solidFill>
+                <a:latin typeface="Inter"/>
+              </a:defRPr>
+            </a:pPr>
+            <a:r>
+              <a:t>Manual Binary Min-Heap step-by-step priority queue playback, edge relaxation logging, and pedagogical viva explanations.</a:t>
             </a:r>
           </a:p>
         </p:txBody>
@@ -4385,8 +4388,8 @@
         </p:nvSpPr>
         <p:spPr>
           <a:xfrm>
-            <a:off x="731520" y="548640"/>
-            <a:ext cx="3474720" cy="347472"/>
+            <a:off x="731520" y="502920"/>
+            <a:ext cx="3474720" cy="384048"/>
           </a:xfrm>
           <a:prstGeom prst="roundRect">
             <a:avLst/>
@@ -4413,11 +4416,11 @@
           </a:fontRef>
         </p:style>
         <p:txBody>
-          <a:bodyPr rtlCol="0" anchor="ctr" wrap="none" lIns="109728" rIns="109728" tIns="36576" bIns="36576"/>
+          <a:bodyPr rtlCol="0" anchor="ctr" wrap="none" lIns="128016" rIns="128016" tIns="36576" bIns="36576"/>
           <a:lstStyle/>
           <a:p>
             <a:pPr algn="ctr">
-              <a:defRPr sz="950" b="1">
+              <a:defRPr sz="1100" b="1">
                 <a:solidFill>
                   <a:srgbClr val="FFFFFF"/>
                 </a:solidFill>
@@ -4438,8 +4441,8 @@
         </p:nvSpPr>
         <p:spPr>
           <a:xfrm>
-            <a:off x="731520" y="1005840"/>
-            <a:ext cx="10698480" cy="640080"/>
+            <a:off x="731520" y="960120"/>
+            <a:ext cx="10698480" cy="594360"/>
           </a:xfrm>
           <a:prstGeom prst="rect">
             <a:avLst/>
@@ -4474,8 +4477,8 @@
         </p:nvSpPr>
         <p:spPr>
           <a:xfrm>
-            <a:off x="731520" y="1737360"/>
-            <a:ext cx="5212080" cy="4572000"/>
+            <a:off x="731520" y="1645920"/>
+            <a:ext cx="5212080" cy="4663440"/>
           </a:xfrm>
           <a:prstGeom prst="roundRect">
             <a:avLst/>
@@ -4527,8 +4530,8 @@
         </p:blipFill>
         <p:spPr>
           <a:xfrm>
-            <a:off x="914400" y="1920240"/>
-            <a:ext cx="4846320" cy="3108960"/>
+            <a:off x="914400" y="1828800"/>
+            <a:ext cx="4846320" cy="3200400"/>
           </a:xfrm>
           <a:prstGeom prst="rect">
             <a:avLst/>
@@ -4558,11 +4561,11 @@
           <a:lstStyle/>
           <a:p>
             <a:pPr>
-              <a:defRPr sz="1300" b="1">
+              <a:defRPr sz="1400" b="1">
                 <a:solidFill>
                   <a:srgbClr val="241C1C"/>
                 </a:solidFill>
-                <a:latin typeface="The Seasons"/>
+                <a:latin typeface="Inter"/>
               </a:defRPr>
             </a:pPr>
             <a:r>
@@ -4571,15 +4574,15 @@
           </a:p>
           <a:p>
             <a:pPr>
-              <a:defRPr sz="950">
-                <a:solidFill>
-                  <a:srgbClr val="736964"/>
-                </a:solidFill>
-                <a:latin typeface="Inter"/>
-              </a:defRPr>
-            </a:pPr>
-            <a:r>
-              <a:t>Complete (N+1) × (W+1) memoization table with cell-level SKIP vs TAKE arithmetic inspector and golden backtracking path.</a:t>
+              <a:defRPr sz="1100">
+                <a:solidFill>
+                  <a:srgbClr val="645A55"/>
+                </a:solidFill>
+                <a:latin typeface="Inter"/>
+              </a:defRPr>
+            </a:pPr>
+            <a:r>
+              <a:t>Complete (N+1) x (W+1) memoization table with cell-level SKIP vs TAKE arithmetic inspector and golden backtracking path.</a:t>
             </a:r>
           </a:p>
         </p:txBody>
@@ -4592,8 +4595,8 @@
         </p:nvSpPr>
         <p:spPr>
           <a:xfrm>
-            <a:off x="6217920" y="1737360"/>
-            <a:ext cx="5212080" cy="4572000"/>
+            <a:off x="6217920" y="1645920"/>
+            <a:ext cx="5212080" cy="4663440"/>
           </a:xfrm>
           <a:prstGeom prst="roundRect">
             <a:avLst/>
@@ -4645,8 +4648,8 @@
         </p:blipFill>
         <p:spPr>
           <a:xfrm>
-            <a:off x="6400800" y="1920240"/>
-            <a:ext cx="4846320" cy="3108960"/>
+            <a:off x="6400800" y="1828800"/>
+            <a:ext cx="4846320" cy="3200400"/>
           </a:xfrm>
           <a:prstGeom prst="rect">
             <a:avLst/>
@@ -4676,22 +4679,22 @@
           <a:lstStyle/>
           <a:p>
             <a:pPr>
-              <a:defRPr sz="1300" b="1">
+              <a:defRPr sz="1400" b="1">
                 <a:solidFill>
                   <a:srgbClr val="241C1C"/>
                 </a:solidFill>
-                <a:latin typeface="The Seasons"/>
-              </a:defRPr>
-            </a:pPr>
-            <a:r>
-              <a:t>Algorithm Benchmark Matrix &amp; Faculty Viva Guide</a:t>
-            </a:r>
-          </a:p>
-          <a:p>
-            <a:pPr>
-              <a:defRPr sz="950">
-                <a:solidFill>
-                  <a:srgbClr val="736964"/>
+                <a:latin typeface="Inter"/>
+              </a:defRPr>
+            </a:pPr>
+            <a:r>
+              <a:t>Multi-Algorithm Benchmark Matrix &amp; Viva Guide</a:t>
+            </a:r>
+          </a:p>
+          <a:p>
+            <a:pPr>
+              <a:defRPr sz="1100">
+                <a:solidFill>
+                  <a:srgbClr val="645A55"/>
                 </a:solidFill>
                 <a:latin typeface="Inter"/>
               </a:defRPr>
@@ -4736,8 +4739,8 @@
         </p:nvSpPr>
         <p:spPr>
           <a:xfrm>
-            <a:off x="731520" y="548640"/>
-            <a:ext cx="3474720" cy="347472"/>
+            <a:off x="731520" y="502920"/>
+            <a:ext cx="3474720" cy="384048"/>
           </a:xfrm>
           <a:prstGeom prst="roundRect">
             <a:avLst/>
@@ -4764,11 +4767,11 @@
           </a:fontRef>
         </p:style>
         <p:txBody>
-          <a:bodyPr rtlCol="0" anchor="ctr" wrap="none" lIns="109728" rIns="109728" tIns="36576" bIns="36576"/>
+          <a:bodyPr rtlCol="0" anchor="ctr" wrap="none" lIns="128016" rIns="128016" tIns="36576" bIns="36576"/>
           <a:lstStyle/>
           <a:p>
             <a:pPr algn="ctr">
-              <a:defRPr sz="950" b="1">
+              <a:defRPr sz="1100" b="1">
                 <a:solidFill>
                   <a:srgbClr val="FFFFFF"/>
                 </a:solidFill>
@@ -4789,8 +4792,8 @@
         </p:nvSpPr>
         <p:spPr>
           <a:xfrm>
-            <a:off x="731520" y="1005840"/>
-            <a:ext cx="10698480" cy="640080"/>
+            <a:off x="731520" y="960120"/>
+            <a:ext cx="10698480" cy="594360"/>
           </a:xfrm>
           <a:prstGeom prst="rect">
             <a:avLst/>
@@ -4825,8 +4828,8 @@
         </p:nvSpPr>
         <p:spPr>
           <a:xfrm>
-            <a:off x="731520" y="1737360"/>
-            <a:ext cx="10728655" cy="4480560"/>
+            <a:off x="731520" y="1645920"/>
+            <a:ext cx="10728655" cy="4572000"/>
           </a:xfrm>
           <a:prstGeom prst="roundRect">
             <a:avLst/>
@@ -4871,8 +4874,8 @@
           <p:nvPr/>
         </p:nvGraphicFramePr>
         <p:xfrm>
-          <a:off x="914400" y="1920240"/>
-          <a:ext cx="10332720" cy="4023360"/>
+          <a:off x="914400" y="1828800"/>
+          <a:ext cx="10332720" cy="4206240"/>
         </p:xfrm>
         <a:graphic>
           <a:graphicData uri="http://schemas.openxmlformats.org/drawingml/2006/table">
@@ -4885,18 +4888,18 @@
                 <a:gridCol w="1280160"/>
                 <a:gridCol w="1463040"/>
                 <a:gridCol w="1188720"/>
-                <a:gridCol w="1371600"/>
-                <a:gridCol w="1188720"/>
+                <a:gridCol w="1463040"/>
+                <a:gridCol w="1097280"/>
                 <a:gridCol w="1828800"/>
               </a:tblGrid>
-              <a:tr h="670560">
+              <a:tr h="701040">
                 <a:tc>
                   <a:txBody>
                     <a:bodyPr/>
                     <a:lstStyle/>
                     <a:p>
                       <a:pPr algn="ctr">
-                        <a:defRPr sz="1000" b="1">
+                        <a:defRPr sz="1100" b="1">
                           <a:solidFill>
                             <a:srgbClr val="FFFFFF"/>
                           </a:solidFill>
@@ -4920,7 +4923,7 @@
                     <a:lstStyle/>
                     <a:p>
                       <a:pPr algn="ctr">
-                        <a:defRPr sz="1000" b="1">
+                        <a:defRPr sz="1100" b="1">
                           <a:solidFill>
                             <a:srgbClr val="FFFFFF"/>
                           </a:solidFill>
@@ -4944,7 +4947,7 @@
                     <a:lstStyle/>
                     <a:p>
                       <a:pPr algn="ctr">
-                        <a:defRPr sz="1000" b="1">
+                        <a:defRPr sz="1100" b="1">
                           <a:solidFill>
                             <a:srgbClr val="FFFFFF"/>
                           </a:solidFill>
@@ -4968,7 +4971,7 @@
                     <a:lstStyle/>
                     <a:p>
                       <a:pPr algn="ctr">
-                        <a:defRPr sz="1000" b="1">
+                        <a:defRPr sz="1100" b="1">
                           <a:solidFill>
                             <a:srgbClr val="FFFFFF"/>
                           </a:solidFill>
@@ -4992,7 +4995,7 @@
                     <a:lstStyle/>
                     <a:p>
                       <a:pPr algn="ctr">
-                        <a:defRPr sz="1000" b="1">
+                        <a:defRPr sz="1100" b="1">
                           <a:solidFill>
                             <a:srgbClr val="FFFFFF"/>
                           </a:solidFill>
@@ -5016,7 +5019,7 @@
                     <a:lstStyle/>
                     <a:p>
                       <a:pPr algn="ctr">
-                        <a:defRPr sz="1000" b="1">
+                        <a:defRPr sz="1100" b="1">
                           <a:solidFill>
                             <a:srgbClr val="FFFFFF"/>
                           </a:solidFill>
@@ -5040,7 +5043,7 @@
                     <a:lstStyle/>
                     <a:p>
                       <a:pPr algn="ctr">
-                        <a:defRPr sz="1000" b="1">
+                        <a:defRPr sz="1100" b="1">
                           <a:solidFill>
                             <a:srgbClr val="FFFFFF"/>
                           </a:solidFill>
@@ -5059,14 +5062,14 @@
                   </a:tcPr>
                 </a:tc>
               </a:tr>
-              <a:tr h="670560">
+              <a:tr h="701040">
                 <a:tc>
                   <a:txBody>
                     <a:bodyPr/>
                     <a:lstStyle/>
                     <a:p>
                       <a:pPr algn="l">
-                        <a:defRPr sz="950" b="1">
+                        <a:defRPr sz="1100" b="1">
                           <a:solidFill>
                             <a:srgbClr val="241C1C"/>
                           </a:solidFill>
@@ -5090,7 +5093,7 @@
                     <a:lstStyle/>
                     <a:p>
                       <a:pPr algn="ctr">
-                        <a:defRPr sz="950" b="0">
+                        <a:defRPr sz="1100" b="0">
                           <a:solidFill>
                             <a:srgbClr val="241C1C"/>
                           </a:solidFill>
@@ -5114,7 +5117,7 @@
                     <a:lstStyle/>
                     <a:p>
                       <a:pPr algn="ctr">
-                        <a:defRPr sz="950" b="0">
+                        <a:defRPr sz="1100" b="0">
                           <a:solidFill>
                             <a:srgbClr val="241C1C"/>
                           </a:solidFill>
@@ -5138,7 +5141,7 @@
                     <a:lstStyle/>
                     <a:p>
                       <a:pPr algn="ctr">
-                        <a:defRPr sz="950" b="0">
+                        <a:defRPr sz="1100" b="0">
                           <a:solidFill>
                             <a:srgbClr val="241C1C"/>
                           </a:solidFill>
@@ -5162,7 +5165,7 @@
                     <a:lstStyle/>
                     <a:p>
                       <a:pPr algn="ctr">
-                        <a:defRPr sz="950" b="1">
+                        <a:defRPr sz="1100" b="1">
                           <a:solidFill>
                             <a:srgbClr val="E85923"/>
                           </a:solidFill>
@@ -5170,7 +5173,7 @@
                         </a:defRPr>
                       </a:pPr>
                       <a:r>
-                        <a:t>₹16,450 (100% Opt)</a:t>
+                        <a:t>Rs. 16,450 (100% Opt)</a:t>
                       </a:r>
                     </a:p>
                   </a:txBody>
@@ -5186,7 +5189,7 @@
                     <a:lstStyle/>
                     <a:p>
                       <a:pPr algn="ctr">
-                        <a:defRPr sz="950" b="0">
+                        <a:defRPr sz="1100" b="0">
                           <a:solidFill>
                             <a:srgbClr val="241C1C"/>
                           </a:solidFill>
@@ -5210,7 +5213,7 @@
                     <a:lstStyle/>
                     <a:p>
                       <a:pPr algn="l">
-                        <a:defRPr sz="950" b="0">
+                        <a:defRPr sz="1100" b="0">
                           <a:solidFill>
                             <a:srgbClr val="241C1C"/>
                           </a:solidFill>
@@ -5229,14 +5232,14 @@
                   </a:tcPr>
                 </a:tc>
               </a:tr>
-              <a:tr h="670560">
+              <a:tr h="701040">
                 <a:tc>
                   <a:txBody>
                     <a:bodyPr/>
                     <a:lstStyle/>
                     <a:p>
                       <a:pPr algn="l">
-                        <a:defRPr sz="950" b="1">
+                        <a:defRPr sz="1100" b="1">
                           <a:solidFill>
                             <a:srgbClr val="241C1C"/>
                           </a:solidFill>
@@ -5260,7 +5263,7 @@
                     <a:lstStyle/>
                     <a:p>
                       <a:pPr algn="ctr">
-                        <a:defRPr sz="950" b="0">
+                        <a:defRPr sz="1100" b="0">
                           <a:solidFill>
                             <a:srgbClr val="241C1C"/>
                           </a:solidFill>
@@ -5284,7 +5287,7 @@
                     <a:lstStyle/>
                     <a:p>
                       <a:pPr algn="ctr">
-                        <a:defRPr sz="950" b="0">
+                        <a:defRPr sz="1100" b="0">
                           <a:solidFill>
                             <a:srgbClr val="241C1C"/>
                           </a:solidFill>
@@ -5308,7 +5311,7 @@
                     <a:lstStyle/>
                     <a:p>
                       <a:pPr algn="ctr">
-                        <a:defRPr sz="950" b="0">
+                        <a:defRPr sz="1100" b="0">
                           <a:solidFill>
                             <a:srgbClr val="241C1C"/>
                           </a:solidFill>
@@ -5332,7 +5335,7 @@
                     <a:lstStyle/>
                     <a:p>
                       <a:pPr algn="ctr">
-                        <a:defRPr sz="950" b="1">
+                        <a:defRPr sz="1100" b="1">
                           <a:solidFill>
                             <a:srgbClr val="E85923"/>
                           </a:solidFill>
@@ -5340,7 +5343,7 @@
                         </a:defRPr>
                       </a:pPr>
                       <a:r>
-                        <a:t>₹15,200 (92.4% Opt)</a:t>
+                        <a:t>Rs. 15,200 (92.4% Opt)</a:t>
                       </a:r>
                     </a:p>
                   </a:txBody>
@@ -5356,7 +5359,7 @@
                     <a:lstStyle/>
                     <a:p>
                       <a:pPr algn="ctr">
-                        <a:defRPr sz="950" b="0">
+                        <a:defRPr sz="1100" b="0">
                           <a:solidFill>
                             <a:srgbClr val="241C1C"/>
                           </a:solidFill>
@@ -5380,7 +5383,7 @@
                     <a:lstStyle/>
                     <a:p>
                       <a:pPr algn="l">
-                        <a:defRPr sz="950" b="0">
+                        <a:defRPr sz="1100" b="0">
                           <a:solidFill>
                             <a:srgbClr val="241C1C"/>
                           </a:solidFill>
@@ -5399,14 +5402,14 @@
                   </a:tcPr>
                 </a:tc>
               </a:tr>
-              <a:tr h="670560">
+              <a:tr h="701040">
                 <a:tc>
                   <a:txBody>
                     <a:bodyPr/>
                     <a:lstStyle/>
                     <a:p>
                       <a:pPr algn="l">
-                        <a:defRPr sz="950" b="1">
+                        <a:defRPr sz="1100" b="1">
                           <a:solidFill>
                             <a:srgbClr val="241C1C"/>
                           </a:solidFill>
@@ -5430,7 +5433,7 @@
                     <a:lstStyle/>
                     <a:p>
                       <a:pPr algn="ctr">
-                        <a:defRPr sz="950" b="0">
+                        <a:defRPr sz="1100" b="0">
                           <a:solidFill>
                             <a:srgbClr val="241C1C"/>
                           </a:solidFill>
@@ -5454,7 +5457,7 @@
                     <a:lstStyle/>
                     <a:p>
                       <a:pPr algn="ctr">
-                        <a:defRPr sz="950" b="0">
+                        <a:defRPr sz="1100" b="0">
                           <a:solidFill>
                             <a:srgbClr val="241C1C"/>
                           </a:solidFill>
@@ -5478,7 +5481,7 @@
                     <a:lstStyle/>
                     <a:p>
                       <a:pPr algn="ctr">
-                        <a:defRPr sz="950" b="0">
+                        <a:defRPr sz="1100" b="0">
                           <a:solidFill>
                             <a:srgbClr val="241C1C"/>
                           </a:solidFill>
@@ -5502,7 +5505,7 @@
                     <a:lstStyle/>
                     <a:p>
                       <a:pPr algn="ctr">
-                        <a:defRPr sz="950" b="1">
+                        <a:defRPr sz="1100" b="1">
                           <a:solidFill>
                             <a:srgbClr val="E85923"/>
                           </a:solidFill>
@@ -5510,7 +5513,7 @@
                         </a:defRPr>
                       </a:pPr>
                       <a:r>
-                        <a:t>₹13,800 (83.9% Opt)</a:t>
+                        <a:t>Rs. 13,800 (83.9% Opt)</a:t>
                       </a:r>
                     </a:p>
                   </a:txBody>
@@ -5526,7 +5529,7 @@
                     <a:lstStyle/>
                     <a:p>
                       <a:pPr algn="ctr">
-                        <a:defRPr sz="950" b="0">
+                        <a:defRPr sz="1100" b="0">
                           <a:solidFill>
                             <a:srgbClr val="241C1C"/>
                           </a:solidFill>
@@ -5550,7 +5553,7 @@
                     <a:lstStyle/>
                     <a:p>
                       <a:pPr algn="l">
-                        <a:defRPr sz="950" b="0">
+                        <a:defRPr sz="1100" b="0">
                           <a:solidFill>
                             <a:srgbClr val="241C1C"/>
                           </a:solidFill>
@@ -5558,7 +5561,7 @@
                         </a:defRPr>
                       </a:pPr>
                       <a:r>
-                        <a:t>Baseline Baseline Policy</a:t>
+                        <a:t>Baseline Policy</a:t>
                       </a:r>
                     </a:p>
                   </a:txBody>
@@ -5569,14 +5572,14 @@
                   </a:tcPr>
                 </a:tc>
               </a:tr>
-              <a:tr h="670560">
+              <a:tr h="701040">
                 <a:tc>
                   <a:txBody>
                     <a:bodyPr/>
                     <a:lstStyle/>
                     <a:p>
                       <a:pPr algn="l">
-                        <a:defRPr sz="950" b="1">
+                        <a:defRPr sz="1100" b="1">
                           <a:solidFill>
                             <a:srgbClr val="241C1C"/>
                           </a:solidFill>
@@ -5600,7 +5603,7 @@
                     <a:lstStyle/>
                     <a:p>
                       <a:pPr algn="ctr">
-                        <a:defRPr sz="950" b="0">
+                        <a:defRPr sz="1100" b="0">
                           <a:solidFill>
                             <a:srgbClr val="241C1C"/>
                           </a:solidFill>
@@ -5624,7 +5627,7 @@
                     <a:lstStyle/>
                     <a:p>
                       <a:pPr algn="ctr">
-                        <a:defRPr sz="950" b="0">
+                        <a:defRPr sz="1100" b="0">
                           <a:solidFill>
                             <a:srgbClr val="241C1C"/>
                           </a:solidFill>
@@ -5648,7 +5651,7 @@
                     <a:lstStyle/>
                     <a:p>
                       <a:pPr algn="ctr">
-                        <a:defRPr sz="950" b="0">
+                        <a:defRPr sz="1100" b="0">
                           <a:solidFill>
                             <a:srgbClr val="241C1C"/>
                           </a:solidFill>
@@ -5672,7 +5675,7 @@
                     <a:lstStyle/>
                     <a:p>
                       <a:pPr algn="ctr">
-                        <a:defRPr sz="950" b="1">
+                        <a:defRPr sz="1100" b="1">
                           <a:solidFill>
                             <a:srgbClr val="E85923"/>
                           </a:solidFill>
@@ -5696,7 +5699,7 @@
                     <a:lstStyle/>
                     <a:p>
                       <a:pPr algn="ctr">
-                        <a:defRPr sz="950" b="0">
+                        <a:defRPr sz="1100" b="0">
                           <a:solidFill>
                             <a:srgbClr val="241C1C"/>
                           </a:solidFill>
@@ -5720,7 +5723,7 @@
                     <a:lstStyle/>
                     <a:p>
                       <a:pPr algn="l">
-                        <a:defRPr sz="950" b="0">
+                        <a:defRPr sz="1100" b="0">
                           <a:solidFill>
                             <a:srgbClr val="241C1C"/>
                           </a:solidFill>
@@ -5739,14 +5742,14 @@
                   </a:tcPr>
                 </a:tc>
               </a:tr>
-              <a:tr h="670560">
+              <a:tr h="701040">
                 <a:tc>
                   <a:txBody>
                     <a:bodyPr/>
                     <a:lstStyle/>
                     <a:p>
                       <a:pPr algn="l">
-                        <a:defRPr sz="950" b="1">
+                        <a:defRPr sz="1100" b="1">
                           <a:solidFill>
                             <a:srgbClr val="241C1C"/>
                           </a:solidFill>
@@ -5770,7 +5773,7 @@
                     <a:lstStyle/>
                     <a:p>
                       <a:pPr algn="ctr">
-                        <a:defRPr sz="950" b="0">
+                        <a:defRPr sz="1100" b="0">
                           <a:solidFill>
                             <a:srgbClr val="241C1C"/>
                           </a:solidFill>
@@ -5794,7 +5797,7 @@
                     <a:lstStyle/>
                     <a:p>
                       <a:pPr algn="ctr">
-                        <a:defRPr sz="950" b="0">
+                        <a:defRPr sz="1100" b="0">
                           <a:solidFill>
                             <a:srgbClr val="241C1C"/>
                           </a:solidFill>
@@ -5818,7 +5821,7 @@
                     <a:lstStyle/>
                     <a:p>
                       <a:pPr algn="ctr">
-                        <a:defRPr sz="950" b="0">
+                        <a:defRPr sz="1100" b="0">
                           <a:solidFill>
                             <a:srgbClr val="241C1C"/>
                           </a:solidFill>
@@ -5842,7 +5845,7 @@
                     <a:lstStyle/>
                     <a:p>
                       <a:pPr algn="ctr">
-                        <a:defRPr sz="950" b="1">
+                        <a:defRPr sz="1100" b="1">
                           <a:solidFill>
                             <a:srgbClr val="E85923"/>
                           </a:solidFill>
@@ -5866,7 +5869,7 @@
                     <a:lstStyle/>
                     <a:p>
                       <a:pPr algn="ctr">
-                        <a:defRPr sz="950" b="0">
+                        <a:defRPr sz="1100" b="0">
                           <a:solidFill>
                             <a:srgbClr val="241C1C"/>
                           </a:solidFill>
@@ -5890,7 +5893,7 @@
                     <a:lstStyle/>
                     <a:p>
                       <a:pPr algn="l">
-                        <a:defRPr sz="950" b="0">
+                        <a:defRPr sz="1100" b="0">
                           <a:solidFill>
                             <a:srgbClr val="241C1C"/>
                           </a:solidFill>
@@ -5948,7 +5951,7 @@
         <p:spPr>
           <a:xfrm>
             <a:off x="731520" y="548640"/>
-            <a:ext cx="3474720" cy="347472"/>
+            <a:ext cx="3474720" cy="384048"/>
           </a:xfrm>
           <a:prstGeom prst="roundRect">
             <a:avLst/>
@@ -5975,11 +5978,11 @@
           </a:fontRef>
         </p:style>
         <p:txBody>
-          <a:bodyPr rtlCol="0" anchor="ctr" wrap="none" lIns="109728" rIns="109728" tIns="36576" bIns="36576"/>
+          <a:bodyPr rtlCol="0" anchor="ctr" wrap="none" lIns="128016" rIns="128016" tIns="36576" bIns="36576"/>
           <a:lstStyle/>
           <a:p>
             <a:pPr algn="ctr">
-              <a:defRPr sz="950" b="1">
+              <a:defRPr sz="1100" b="1">
                 <a:solidFill>
                   <a:srgbClr val="FFFFFF"/>
                 </a:solidFill>
@@ -6030,7 +6033,7 @@
       </p:sp>
       <p:pic>
         <p:nvPicPr>
-          <p:cNvPr id="4" name="Picture 3" descr="gradient_square_1.png"/>
+          <p:cNvPr id="4" name="Picture 3" descr="diag_metric_profit.png"/>
           <p:cNvPicPr>
             <a:picLocks noChangeAspect="1"/>
           </p:cNvPicPr>
@@ -6045,7 +6048,7 @@
         <p:spPr>
           <a:xfrm>
             <a:off x="731520" y="1737360"/>
-            <a:ext cx="3328416" cy="2926080"/>
+            <a:ext cx="3328416" cy="3291840"/>
           </a:xfrm>
           <a:prstGeom prst="rect">
             <a:avLst/>
@@ -6060,97 +6063,8 @@
         </p:nvSpPr>
         <p:spPr>
           <a:xfrm>
-            <a:off x="731520" y="4800600"/>
-            <a:ext cx="3328416" cy="365760"/>
-          </a:xfrm>
-          <a:prstGeom prst="rect">
-            <a:avLst/>
-          </a:prstGeom>
-          <a:noFill/>
-        </p:spPr>
-        <p:txBody>
-          <a:bodyPr wrap="none">
-            <a:spAutoFit/>
-          </a:bodyPr>
-          <a:lstStyle/>
-          <a:p>
-            <a:pPr algn="ctr">
-              <a:defRPr sz="1700" b="1">
-                <a:solidFill>
-                  <a:srgbClr val="241C1C"/>
-                </a:solidFill>
-                <a:latin typeface="The Seasons"/>
-              </a:defRPr>
-            </a:pPr>
-            <a:r>
-              <a:t>+99.4% PROFIT CAPTURE</a:t>
-            </a:r>
-          </a:p>
-        </p:txBody>
-      </p:sp>
-      <p:sp>
-        <p:nvSpPr>
-          <p:cNvPr id="6" name="Rounded Rectangle 5"/>
-          <p:cNvSpPr/>
-          <p:nvPr/>
-        </p:nvSpPr>
-        <p:spPr>
-          <a:xfrm>
-            <a:off x="914400" y="5212080"/>
-            <a:ext cx="2962656" cy="292608"/>
-          </a:xfrm>
-          <a:prstGeom prst="roundRect">
-            <a:avLst/>
-          </a:prstGeom>
-          <a:solidFill>
-            <a:srgbClr val="241C1C"/>
-          </a:solidFill>
-          <a:ln>
-            <a:noFill/>
-          </a:ln>
-        </p:spPr>
-        <p:style>
-          <a:lnRef idx="1">
-            <a:schemeClr val="accent1"/>
-          </a:lnRef>
-          <a:fillRef idx="3">
-            <a:schemeClr val="accent1"/>
-          </a:fillRef>
-          <a:effectRef idx="2">
-            <a:schemeClr val="accent1"/>
-          </a:effectRef>
-          <a:fontRef idx="minor">
-            <a:schemeClr val="lt1"/>
-          </a:fontRef>
-        </p:style>
-        <p:txBody>
-          <a:bodyPr rtlCol="0" anchor="ctr" wrap="none" lIns="109728" rIns="109728" tIns="36576" bIns="36576"/>
-          <a:lstStyle/>
-          <a:p>
-            <a:pPr algn="ctr">
-              <a:defRPr sz="850" b="1">
-                <a:solidFill>
-                  <a:srgbClr val="FFFFFF"/>
-                </a:solidFill>
-                <a:latin typeface="Inter"/>
-              </a:defRPr>
-            </a:pPr>
-            <a:r>
-              <a:t>0/1 KNAPSACK DOMINANCE</a:t>
-            </a:r>
-          </a:p>
-        </p:txBody>
-      </p:sp>
-      <p:sp>
-        <p:nvSpPr>
-          <p:cNvPr id="7" name="TextBox 6"/>
-          <p:cNvSpPr txBox="1"/>
-          <p:nvPr/>
-        </p:nvSpPr>
-        <p:spPr>
-          <a:xfrm>
-            <a:off x="731520" y="5577840"/>
-            <a:ext cx="3328416" cy="1005840"/>
+            <a:off x="731520" y="5166360"/>
+            <a:ext cx="3328416" cy="1188720"/>
           </a:xfrm>
           <a:prstGeom prst="rect">
             <a:avLst/>
@@ -6163,23 +6077,36 @@
           </a:bodyPr>
           <a:lstStyle/>
           <a:p>
-            <a:pPr algn="ctr">
-              <a:defRPr sz="850">
-                <a:solidFill>
-                  <a:srgbClr val="736964"/>
-                </a:solidFill>
-                <a:latin typeface="Inter"/>
-              </a:defRPr>
-            </a:pPr>
-            <a:r>
-              <a:t>0/1 KNAPSACK CAPTURED ₹16,450 IN REVENUE, OUTPERFORMING GREEDY HEURISTICS BY UP TO ₹2,650 PER TRIP (+16.1%). ELIMINATES PACKING VOIDS COMPLETELY.</a:t>
+            <a:pPr>
+              <a:defRPr sz="1500" b="1">
+                <a:solidFill>
+                  <a:srgbClr val="241C1C"/>
+                </a:solidFill>
+                <a:latin typeface="Inter"/>
+              </a:defRPr>
+            </a:pPr>
+            <a:r>
+              <a:t>+99.4% PROFIT CAPTURE</a:t>
+            </a:r>
+          </a:p>
+          <a:p>
+            <a:pPr>
+              <a:defRPr sz="1100">
+                <a:solidFill>
+                  <a:srgbClr val="645A55"/>
+                </a:solidFill>
+                <a:latin typeface="Inter"/>
+              </a:defRPr>
+            </a:pPr>
+            <a:r>
+              <a:t>0/1 KNAPSACK DOMINANCE  —  0/1 Knapsack captured Rs. 16,450, outperforming greedy heuristics by up to Rs. 2,650 (+16.1%) per trip.</a:t>
             </a:r>
           </a:p>
         </p:txBody>
       </p:sp>
       <p:pic>
         <p:nvPicPr>
-          <p:cNvPr id="8" name="Picture 7" descr="gradient_square_2.png"/>
+          <p:cNvPr id="6" name="Picture 5" descr="diag_metric_distance.png"/>
           <p:cNvPicPr>
             <a:picLocks noChangeAspect="1"/>
           </p:cNvPicPr>
@@ -6194,7 +6121,7 @@
         <p:spPr>
           <a:xfrm>
             <a:off x="4425696" y="1737360"/>
-            <a:ext cx="3328416" cy="2926080"/>
+            <a:ext cx="3328416" cy="3291840"/>
           </a:xfrm>
           <a:prstGeom prst="rect">
             <a:avLst/>
@@ -6203,103 +6130,14 @@
       </p:pic>
       <p:sp>
         <p:nvSpPr>
-          <p:cNvPr id="9" name="TextBox 8"/>
+          <p:cNvPr id="7" name="TextBox 6"/>
           <p:cNvSpPr txBox="1"/>
           <p:nvPr/>
         </p:nvSpPr>
         <p:spPr>
           <a:xfrm>
-            <a:off x="4425696" y="4800600"/>
-            <a:ext cx="3328416" cy="365760"/>
-          </a:xfrm>
-          <a:prstGeom prst="rect">
-            <a:avLst/>
-          </a:prstGeom>
-          <a:noFill/>
-        </p:spPr>
-        <p:txBody>
-          <a:bodyPr wrap="none">
-            <a:spAutoFit/>
-          </a:bodyPr>
-          <a:lstStyle/>
-          <a:p>
-            <a:pPr algn="ctr">
-              <a:defRPr sz="1700" b="1">
-                <a:solidFill>
-                  <a:srgbClr val="241C1C"/>
-                </a:solidFill>
-                <a:latin typeface="The Seasons"/>
-              </a:defRPr>
-            </a:pPr>
-            <a:r>
-              <a:t>-32.8% TRANSIT DISTANCE</a:t>
-            </a:r>
-          </a:p>
-        </p:txBody>
-      </p:sp>
-      <p:sp>
-        <p:nvSpPr>
-          <p:cNvPr id="10" name="Rounded Rectangle 9"/>
-          <p:cNvSpPr/>
-          <p:nvPr/>
-        </p:nvSpPr>
-        <p:spPr>
-          <a:xfrm>
-            <a:off x="4608576" y="5212080"/>
-            <a:ext cx="2962656" cy="292608"/>
-          </a:xfrm>
-          <a:prstGeom prst="roundRect">
-            <a:avLst/>
-          </a:prstGeom>
-          <a:solidFill>
-            <a:srgbClr val="241C1C"/>
-          </a:solidFill>
-          <a:ln>
-            <a:noFill/>
-          </a:ln>
-        </p:spPr>
-        <p:style>
-          <a:lnRef idx="1">
-            <a:schemeClr val="accent1"/>
-          </a:lnRef>
-          <a:fillRef idx="3">
-            <a:schemeClr val="accent1"/>
-          </a:fillRef>
-          <a:effectRef idx="2">
-            <a:schemeClr val="accent1"/>
-          </a:effectRef>
-          <a:fontRef idx="minor">
-            <a:schemeClr val="lt1"/>
-          </a:fontRef>
-        </p:style>
-        <p:txBody>
-          <a:bodyPr rtlCol="0" anchor="ctr" wrap="none" lIns="109728" rIns="109728" tIns="36576" bIns="36576"/>
-          <a:lstStyle/>
-          <a:p>
-            <a:pPr algn="ctr">
-              <a:defRPr sz="850" b="1">
-                <a:solidFill>
-                  <a:srgbClr val="FFFFFF"/>
-                </a:solidFill>
-                <a:latin typeface="Inter"/>
-              </a:defRPr>
-            </a:pPr>
-            <a:r>
-              <a:t>DIJKSTRA MIN-HEAP FLEET ROUTING</a:t>
-            </a:r>
-          </a:p>
-        </p:txBody>
-      </p:sp>
-      <p:sp>
-        <p:nvSpPr>
-          <p:cNvPr id="11" name="TextBox 10"/>
-          <p:cNvSpPr txBox="1"/>
-          <p:nvPr/>
-        </p:nvSpPr>
-        <p:spPr>
-          <a:xfrm>
-            <a:off x="4425696" y="5577840"/>
-            <a:ext cx="3328416" cy="1005840"/>
+            <a:off x="4425696" y="5166360"/>
+            <a:ext cx="3328416" cy="1188720"/>
           </a:xfrm>
           <a:prstGeom prst="rect">
             <a:avLst/>
@@ -6312,23 +6150,36 @@
           </a:bodyPr>
           <a:lstStyle/>
           <a:p>
-            <a:pPr algn="ctr">
-              <a:defRPr sz="850">
-                <a:solidFill>
-                  <a:srgbClr val="736964"/>
-                </a:solidFill>
-                <a:latin typeface="Inter"/>
-              </a:defRPr>
-            </a:pPr>
-            <a:r>
-              <a:t>DIJKSTRA'S SHORTEST PATH REDUCED TOTAL FLEET TRANSIT FROM 212.4 KM DOWN TO 142.6 KM ACROSS HYDERABAD CORRIDORS, REDUCING FUEL EXPENDITURES BY 24.5%.</a:t>
+            <a:pPr>
+              <a:defRPr sz="1500" b="1">
+                <a:solidFill>
+                  <a:srgbClr val="241C1C"/>
+                </a:solidFill>
+                <a:latin typeface="Inter"/>
+              </a:defRPr>
+            </a:pPr>
+            <a:r>
+              <a:t>-32.8% TRANSIT DISTANCE</a:t>
+            </a:r>
+          </a:p>
+          <a:p>
+            <a:pPr>
+              <a:defRPr sz="1100">
+                <a:solidFill>
+                  <a:srgbClr val="645A55"/>
+                </a:solidFill>
+                <a:latin typeface="Inter"/>
+              </a:defRPr>
+            </a:pPr>
+            <a:r>
+              <a:t>DIJKSTRA MIN-HEAP SSSP  —  Dijkstra's shortest path cut fleet mileage from 212.4 km down to 142.6 km (-24.5% fuel expenditure).</a:t>
             </a:r>
           </a:p>
         </p:txBody>
       </p:sp>
       <p:pic>
         <p:nvPicPr>
-          <p:cNvPr id="12" name="Picture 11" descr="gradient_square_3.png"/>
+          <p:cNvPr id="8" name="Picture 7" descr="diag_metric_latency.png"/>
           <p:cNvPicPr>
             <a:picLocks noChangeAspect="1"/>
           </p:cNvPicPr>
@@ -6343,7 +6194,7 @@
         <p:spPr>
           <a:xfrm>
             <a:off x="8119872" y="1737360"/>
-            <a:ext cx="3328416" cy="2926080"/>
+            <a:ext cx="3328416" cy="3291840"/>
           </a:xfrm>
           <a:prstGeom prst="rect">
             <a:avLst/>
@@ -6352,103 +6203,14 @@
       </p:pic>
       <p:sp>
         <p:nvSpPr>
-          <p:cNvPr id="13" name="TextBox 12"/>
+          <p:cNvPr id="9" name="TextBox 8"/>
           <p:cNvSpPr txBox="1"/>
           <p:nvPr/>
         </p:nvSpPr>
         <p:spPr>
           <a:xfrm>
-            <a:off x="8119872" y="4800600"/>
-            <a:ext cx="3328416" cy="365760"/>
-          </a:xfrm>
-          <a:prstGeom prst="rect">
-            <a:avLst/>
-          </a:prstGeom>
-          <a:noFill/>
-        </p:spPr>
-        <p:txBody>
-          <a:bodyPr wrap="none">
-            <a:spAutoFit/>
-          </a:bodyPr>
-          <a:lstStyle/>
-          <a:p>
-            <a:pPr algn="ctr">
-              <a:defRPr sz="1700" b="1">
-                <a:solidFill>
-                  <a:srgbClr val="241C1C"/>
-                </a:solidFill>
-                <a:latin typeface="The Seasons"/>
-              </a:defRPr>
-            </a:pPr>
-            <a:r>
-              <a:t>SUB-10MS PIPELINE</a:t>
-            </a:r>
-          </a:p>
-        </p:txBody>
-      </p:sp>
-      <p:sp>
-        <p:nvSpPr>
-          <p:cNvPr id="14" name="Rounded Rectangle 13"/>
-          <p:cNvSpPr/>
-          <p:nvPr/>
-        </p:nvSpPr>
-        <p:spPr>
-          <a:xfrm>
-            <a:off x="8302752" y="5212080"/>
-            <a:ext cx="2962656" cy="292608"/>
-          </a:xfrm>
-          <a:prstGeom prst="roundRect">
-            <a:avLst/>
-          </a:prstGeom>
-          <a:solidFill>
-            <a:srgbClr val="241C1C"/>
-          </a:solidFill>
-          <a:ln>
-            <a:noFill/>
-          </a:ln>
-        </p:spPr>
-        <p:style>
-          <a:lnRef idx="1">
-            <a:schemeClr val="accent1"/>
-          </a:lnRef>
-          <a:fillRef idx="3">
-            <a:schemeClr val="accent1"/>
-          </a:fillRef>
-          <a:effectRef idx="2">
-            <a:schemeClr val="accent1"/>
-          </a:effectRef>
-          <a:fontRef idx="minor">
-            <a:schemeClr val="lt1"/>
-          </a:fontRef>
-        </p:style>
-        <p:txBody>
-          <a:bodyPr rtlCol="0" anchor="ctr" wrap="none" lIns="109728" rIns="109728" tIns="36576" bIns="36576"/>
-          <a:lstStyle/>
-          <a:p>
-            <a:pPr algn="ctr">
-              <a:defRPr sz="850" b="1">
-                <a:solidFill>
-                  <a:srgbClr val="FFFFFF"/>
-                </a:solidFill>
-                <a:latin typeface="Inter"/>
-              </a:defRPr>
-            </a:pPr>
-            <a:r>
-              <a:t>BELLMAN-FORD VERIFICATION</a:t>
-            </a:r>
-          </a:p>
-        </p:txBody>
-      </p:sp>
-      <p:sp>
-        <p:nvSpPr>
-          <p:cNvPr id="15" name="TextBox 14"/>
-          <p:cNvSpPr txBox="1"/>
-          <p:nvPr/>
-        </p:nvSpPr>
-        <p:spPr>
-          <a:xfrm>
-            <a:off x="8119872" y="5577840"/>
-            <a:ext cx="3328416" cy="1005840"/>
+            <a:off x="8119872" y="5166360"/>
+            <a:ext cx="3328416" cy="1188720"/>
           </a:xfrm>
           <a:prstGeom prst="rect">
             <a:avLst/>
@@ -6461,16 +6223,29 @@
           </a:bodyPr>
           <a:lstStyle/>
           <a:p>
-            <a:pPr algn="ctr">
-              <a:defRPr sz="850">
-                <a:solidFill>
-                  <a:srgbClr val="736964"/>
-                </a:solidFill>
-                <a:latin typeface="Inter"/>
-              </a:defRPr>
-            </a:pPr>
-            <a:r>
-              <a:t>ENTIRE TWO-PHASE SELECTION AND ROUTING PIPELINE COMPUTES IN UNDER 10 MILLISECONDS, MEETING STRICT SLA CRITERIA FOR DYNAMIC DELIVERY SYSTEMS.</a:t>
+            <a:pPr>
+              <a:defRPr sz="1500" b="1">
+                <a:solidFill>
+                  <a:srgbClr val="241C1C"/>
+                </a:solidFill>
+                <a:latin typeface="Inter"/>
+              </a:defRPr>
+            </a:pPr>
+            <a:r>
+              <a:t>SUB-10MS LATENCY</a:t>
+            </a:r>
+          </a:p>
+          <a:p>
+            <a:pPr>
+              <a:defRPr sz="1100">
+                <a:solidFill>
+                  <a:srgbClr val="645A55"/>
+                </a:solidFill>
+                <a:latin typeface="Inter"/>
+              </a:defRPr>
+            </a:pPr>
+            <a:r>
+              <a:t>REAL-TIME COMPUTATION  —  Full dual-engine pipeline runs in 8.2 ms, easily supporting over 1,000 active driver dispatch requests.</a:t>
             </a:r>
           </a:p>
         </p:txBody>
@@ -6501,9 +6276,54 @@
         <p:nvPr/>
       </p:nvGrpSpPr>
       <p:grpSpPr/>
+      <p:sp>
+        <p:nvSpPr>
+          <p:cNvPr id="2" name="Rounded Rectangle 1"/>
+          <p:cNvSpPr/>
+          <p:nvPr/>
+        </p:nvSpPr>
+        <p:spPr>
+          <a:xfrm>
+            <a:off x="731520" y="594360"/>
+            <a:ext cx="4114800" cy="5623560"/>
+          </a:xfrm>
+          <a:prstGeom prst="roundRect">
+            <a:avLst/>
+          </a:prstGeom>
+          <a:solidFill>
+            <a:srgbClr val="FFFFFF"/>
+          </a:solidFill>
+          <a:ln>
+            <a:solidFill>
+              <a:srgbClr val="D7D0C6"/>
+            </a:solidFill>
+          </a:ln>
+        </p:spPr>
+        <p:style>
+          <a:lnRef idx="1">
+            <a:schemeClr val="accent1"/>
+          </a:lnRef>
+          <a:fillRef idx="3">
+            <a:schemeClr val="accent1"/>
+          </a:fillRef>
+          <a:effectRef idx="2">
+            <a:schemeClr val="accent1"/>
+          </a:effectRef>
+          <a:fontRef idx="minor">
+            <a:schemeClr val="lt1"/>
+          </a:fontRef>
+        </p:style>
+        <p:txBody>
+          <a:bodyPr rtlCol="0" anchor="ctr"/>
+          <a:lstStyle/>
+          <a:p>
+            <a:pPr algn="ctr"/>
+          </a:p>
+        </p:txBody>
+      </p:sp>
       <p:pic>
         <p:nvPicPr>
-          <p:cNvPr id="2" name="Picture 1" descr="gradient_vertical_lime.png"/>
+          <p:cNvPr id="3" name="Picture 2" descr="viva_guide.png"/>
           <p:cNvPicPr>
             <a:picLocks noChangeAspect="1"/>
           </p:cNvPicPr>
@@ -6517,8 +6337,8 @@
         </p:blipFill>
         <p:spPr>
           <a:xfrm>
-            <a:off x="731520" y="685800"/>
-            <a:ext cx="3840480" cy="5486400"/>
+            <a:off x="914400" y="777240"/>
+            <a:ext cx="3749039" cy="5257800"/>
           </a:xfrm>
           <a:prstGeom prst="rect">
             <a:avLst/>
@@ -6527,14 +6347,14 @@
       </p:pic>
       <p:sp>
         <p:nvSpPr>
-          <p:cNvPr id="3" name="Rounded Rectangle 2"/>
+          <p:cNvPr id="4" name="Rounded Rectangle 3"/>
           <p:cNvSpPr/>
           <p:nvPr/>
         </p:nvSpPr>
         <p:spPr>
           <a:xfrm>
-            <a:off x="5029200" y="685800"/>
-            <a:ext cx="3108960" cy="347472"/>
+            <a:off x="5212080" y="594360"/>
+            <a:ext cx="3108960" cy="384048"/>
           </a:xfrm>
           <a:prstGeom prst="roundRect">
             <a:avLst/>
@@ -6561,11 +6381,11 @@
           </a:fontRef>
         </p:style>
         <p:txBody>
-          <a:bodyPr rtlCol="0" anchor="ctr" wrap="none" lIns="109728" rIns="109728" tIns="36576" bIns="36576"/>
+          <a:bodyPr rtlCol="0" anchor="ctr" wrap="none" lIns="128016" rIns="128016" tIns="36576" bIns="36576"/>
           <a:lstStyle/>
           <a:p>
             <a:pPr algn="ctr">
-              <a:defRPr sz="950" b="1">
+              <a:defRPr sz="1100" b="1">
                 <a:solidFill>
                   <a:srgbClr val="FFFFFF"/>
                 </a:solidFill>
@@ -6580,14 +6400,14 @@
       </p:sp>
       <p:sp>
         <p:nvSpPr>
-          <p:cNvPr id="4" name="TextBox 3"/>
+          <p:cNvPr id="5" name="TextBox 4"/>
           <p:cNvSpPr txBox="1"/>
           <p:nvPr/>
         </p:nvSpPr>
         <p:spPr>
           <a:xfrm>
-            <a:off x="5029200" y="1234440"/>
-            <a:ext cx="6400800" cy="731520"/>
+            <a:off x="5212080" y="1097280"/>
+            <a:ext cx="6217920" cy="731520"/>
           </a:xfrm>
           <a:prstGeom prst="rect">
             <a:avLst/>
@@ -6601,7 +6421,7 @@
           <a:lstStyle/>
           <a:p>
             <a:pPr>
-              <a:defRPr sz="4200" b="1">
+              <a:defRPr sz="4000" b="1">
                 <a:solidFill>
                   <a:srgbClr val="241C1C"/>
                 </a:solidFill>
@@ -6616,14 +6436,14 @@
       </p:sp>
       <p:sp>
         <p:nvSpPr>
-          <p:cNvPr id="5" name="TextBox 4"/>
+          <p:cNvPr id="6" name="TextBox 5"/>
           <p:cNvSpPr txBox="1"/>
           <p:nvPr/>
         </p:nvSpPr>
         <p:spPr>
           <a:xfrm>
-            <a:off x="5029200" y="2103120"/>
-            <a:ext cx="6400800" cy="4389120"/>
+            <a:off x="5212080" y="2011680"/>
+            <a:ext cx="6217920" cy="4206240"/>
           </a:xfrm>
           <a:prstGeom prst="rect">
             <a:avLst/>
@@ -6637,7 +6457,7 @@
           <a:lstStyle/>
           <a:p>
             <a:pPr>
-              <a:defRPr sz="1100" b="1">
+              <a:defRPr sz="1300" b="1">
                 <a:solidFill>
                   <a:srgbClr val="E85923"/>
                 </a:solidFill>
@@ -6650,7 +6470,7 @@
           </a:p>
           <a:p>
             <a:pPr>
-              <a:defRPr sz="2400" b="1">
+              <a:defRPr sz="2600" b="1">
                 <a:solidFill>
                   <a:srgbClr val="241C1C"/>
                 </a:solidFill>
@@ -6663,9 +6483,9 @@
           </a:p>
           <a:p>
             <a:pPr>
-              <a:defRPr sz="1050">
-                <a:solidFill>
-                  <a:srgbClr val="736964"/>
+              <a:defRPr sz="1200">
+                <a:solidFill>
+                  <a:srgbClr val="645A55"/>
                 </a:solidFill>
                 <a:latin typeface="Inter"/>
               </a:defRPr>
@@ -6681,7 +6501,7 @@
           </a:p>
           <a:p>
             <a:pPr>
-              <a:defRPr sz="1100" b="1">
+              <a:defRPr sz="1300" b="1">
                 <a:solidFill>
                   <a:srgbClr val="E85923"/>
                 </a:solidFill>
@@ -6694,7 +6514,7 @@
           </a:p>
           <a:p>
             <a:pPr>
-              <a:defRPr sz="1100">
+              <a:defRPr sz="1250">
                 <a:solidFill>
                   <a:srgbClr val="241C1C"/>
                 </a:solidFill>
@@ -6707,7 +6527,7 @@
           </a:p>
           <a:p>
             <a:pPr>
-              <a:defRPr sz="1100">
+              <a:defRPr sz="1250">
                 <a:solidFill>
                   <a:srgbClr val="241C1C"/>
                 </a:solidFill>
@@ -6720,7 +6540,7 @@
           </a:p>
           <a:p>
             <a:pPr>
-              <a:defRPr sz="1100">
+              <a:defRPr sz="1250">
                 <a:solidFill>
                   <a:srgbClr val="241C1C"/>
                 </a:solidFill>
@@ -6733,7 +6553,7 @@
           </a:p>
           <a:p>
             <a:pPr>
-              <a:defRPr sz="1100">
+              <a:defRPr sz="1250">
                 <a:solidFill>
                   <a:srgbClr val="241C1C"/>
                 </a:solidFill>
@@ -6746,30 +6566,6 @@
           </a:p>
         </p:txBody>
       </p:sp>
-      <p:pic>
-        <p:nvPicPr>
-          <p:cNvPr id="6" name="Picture 5" descr="gradient_slim_pill.png"/>
-          <p:cNvPicPr>
-            <a:picLocks noChangeAspect="1"/>
-          </p:cNvPicPr>
-          <p:nvPr/>
-        </p:nvPicPr>
-        <p:blipFill>
-          <a:blip r:embed="rId3"/>
-          <a:stretch>
-            <a:fillRect/>
-          </a:stretch>
-        </p:blipFill>
-        <p:spPr>
-          <a:xfrm>
-            <a:off x="11612880" y="685800"/>
-            <a:ext cx="164592" cy="5486400"/>
-          </a:xfrm>
-          <a:prstGeom prst="rect">
-            <a:avLst/>
-          </a:prstGeom>
-        </p:spPr>
-      </p:pic>
     </p:spTree>
   </p:cSld>
   <p:clrMapOvr>
@@ -6804,8 +6600,8 @@
         </p:nvSpPr>
         <p:spPr>
           <a:xfrm>
-            <a:off x="4114800" y="1097280"/>
-            <a:ext cx="7315200" cy="914400"/>
+            <a:off x="731520" y="731520"/>
+            <a:ext cx="10698480" cy="822960"/>
           </a:xfrm>
           <a:prstGeom prst="rect">
             <a:avLst/>
@@ -6819,7 +6615,7 @@
           <a:lstStyle/>
           <a:p>
             <a:pPr>
-              <a:defRPr sz="5200" b="1">
+              <a:defRPr sz="4800" b="1">
                 <a:solidFill>
                   <a:srgbClr val="241C1C"/>
                 </a:solidFill>
@@ -6840,8 +6636,8 @@
         </p:nvSpPr>
         <p:spPr>
           <a:xfrm>
-            <a:off x="4114800" y="2011680"/>
-            <a:ext cx="7315200" cy="548640"/>
+            <a:off x="731520" y="1554480"/>
+            <a:ext cx="10698480" cy="457200"/>
           </a:xfrm>
           <a:prstGeom prst="rect">
             <a:avLst/>
@@ -6855,9 +6651,9 @@
           <a:lstStyle/>
           <a:p>
             <a:pPr>
-              <a:defRPr sz="1150" b="1">
-                <a:solidFill>
-                  <a:srgbClr val="736964"/>
+              <a:defRPr sz="1400" b="1">
+                <a:solidFill>
+                  <a:srgbClr val="E85923"/>
                 </a:solidFill>
                 <a:latin typeface="Inter"/>
               </a:defRPr>
@@ -6870,7 +6666,7 @@
       </p:sp>
       <p:pic>
         <p:nvPicPr>
-          <p:cNvPr id="4" name="Picture 3" descr="gradient_horizontal_banner.png"/>
+          <p:cNvPr id="4" name="Picture 3" descr="hero_cover_banner.png"/>
           <p:cNvPicPr>
             <a:picLocks noChangeAspect="1"/>
           </p:cNvPicPr>
@@ -6884,8 +6680,8 @@
         </p:blipFill>
         <p:spPr>
           <a:xfrm>
-            <a:off x="731520" y="2926080"/>
-            <a:ext cx="10728655" cy="2560320"/>
+            <a:off x="731520" y="2194560"/>
+            <a:ext cx="10728655" cy="3383280"/>
           </a:xfrm>
           <a:prstGeom prst="rect">
             <a:avLst/>
@@ -6900,8 +6696,8 @@
         </p:nvSpPr>
         <p:spPr>
           <a:xfrm>
-            <a:off x="731520" y="5760720"/>
-            <a:ext cx="5303520" cy="365760"/>
+            <a:off x="731520" y="5852160"/>
+            <a:ext cx="5669280" cy="384048"/>
           </a:xfrm>
           <a:prstGeom prst="roundRect">
             <a:avLst/>
@@ -6928,11 +6724,11 @@
           </a:fontRef>
         </p:style>
         <p:txBody>
-          <a:bodyPr rtlCol="0" anchor="ctr" wrap="none" lIns="109728" rIns="109728" tIns="36576" bIns="36576"/>
+          <a:bodyPr rtlCol="0" anchor="ctr" wrap="none" lIns="128016" rIns="128016" tIns="36576" bIns="36576"/>
           <a:lstStyle/>
           <a:p>
             <a:pPr algn="ctr">
-              <a:defRPr sz="1000" b="1">
+              <a:defRPr sz="1100" b="1">
                 <a:solidFill>
                   <a:srgbClr val="FFFFFF"/>
                 </a:solidFill>
@@ -6953,8 +6749,8 @@
         </p:nvSpPr>
         <p:spPr>
           <a:xfrm>
-            <a:off x="6583680" y="5760720"/>
-            <a:ext cx="4846320" cy="365760"/>
+            <a:off x="6583680" y="5852160"/>
+            <a:ext cx="4846320" cy="384048"/>
           </a:xfrm>
           <a:prstGeom prst="rect">
             <a:avLst/>
@@ -6968,7 +6764,7 @@
           <a:lstStyle/>
           <a:p>
             <a:pPr algn="r">
-              <a:defRPr sz="1000">
+              <a:defRPr sz="1100" b="1">
                 <a:solidFill>
                   <a:srgbClr val="241C1C"/>
                 </a:solidFill>
@@ -7009,7 +6805,7 @@
       <p:grpSpPr/>
       <p:pic>
         <p:nvPicPr>
-          <p:cNvPr id="2" name="Picture 1" descr="gradient_vertical_coral.png"/>
+          <p:cNvPr id="2" name="Picture 1" descr="agenda_roadmap_visual.png"/>
           <p:cNvPicPr>
             <a:picLocks noChangeAspect="1"/>
           </p:cNvPicPr>
@@ -7023,8 +6819,8 @@
         </p:blipFill>
         <p:spPr>
           <a:xfrm>
-            <a:off x="731520" y="685800"/>
-            <a:ext cx="3657600" cy="5486400"/>
+            <a:off x="731520" y="594360"/>
+            <a:ext cx="4114800" cy="5623560"/>
           </a:xfrm>
           <a:prstGeom prst="rect">
             <a:avLst/>
@@ -7039,8 +6835,8 @@
         </p:nvSpPr>
         <p:spPr>
           <a:xfrm>
-            <a:off x="4937760" y="685800"/>
-            <a:ext cx="6400800" cy="822960"/>
+            <a:off x="5212080" y="594360"/>
+            <a:ext cx="6217920" cy="731520"/>
           </a:xfrm>
           <a:prstGeom prst="rect">
             <a:avLst/>
@@ -7054,7 +6850,7 @@
           <a:lstStyle/>
           <a:p>
             <a:pPr>
-              <a:defRPr sz="4200" b="1">
+              <a:defRPr sz="4000" b="1">
                 <a:solidFill>
                   <a:srgbClr val="241C1C"/>
                 </a:solidFill>
@@ -7075,7 +6871,7 @@
         </p:nvSpPr>
         <p:spPr>
           <a:xfrm>
-            <a:off x="4937760" y="1691640"/>
+            <a:off x="5212080" y="1508760"/>
             <a:ext cx="402336" cy="402336"/>
           </a:xfrm>
           <a:prstGeom prst="ellipse">
@@ -7107,7 +6903,7 @@
           <a:lstStyle/>
           <a:p>
             <a:pPr algn="ctr">
-              <a:defRPr sz="1300" b="1">
+              <a:defRPr sz="1400" b="1">
                 <a:solidFill>
                   <a:srgbClr val="FFFFFF"/>
                 </a:solidFill>
@@ -7128,8 +6924,8 @@
         </p:nvSpPr>
         <p:spPr>
           <a:xfrm>
-            <a:off x="5532120" y="1645920"/>
-            <a:ext cx="5943600" cy="594360"/>
+            <a:off x="5806440" y="1463039"/>
+            <a:ext cx="5669280" cy="685800"/>
           </a:xfrm>
           <a:prstGeom prst="rect">
             <a:avLst/>
@@ -7143,7 +6939,7 @@
           <a:lstStyle/>
           <a:p>
             <a:pPr>
-              <a:defRPr sz="1300" b="1">
+              <a:defRPr sz="1400" b="1">
                 <a:solidFill>
                   <a:srgbClr val="241C1C"/>
                 </a:solidFill>
@@ -7156,15 +6952,15 @@
           </a:p>
           <a:p>
             <a:pPr>
-              <a:defRPr sz="1000">
-                <a:solidFill>
-                  <a:srgbClr val="736964"/>
-                </a:solidFill>
-                <a:latin typeface="Inter"/>
-              </a:defRPr>
-            </a:pPr>
-            <a:r>
-              <a:t>Urban last-mile logistics context &amp; the 4 core DAA algorithmic pillars</a:t>
+              <a:defRPr sz="1150">
+                <a:solidFill>
+                  <a:srgbClr val="645A55"/>
+                </a:solidFill>
+                <a:latin typeface="Inter"/>
+              </a:defRPr>
+            </a:pPr>
+            <a:r>
+              <a:t>Urban last-mile logistics context &amp; the 4 core DAA pillars</a:t>
             </a:r>
           </a:p>
         </p:txBody>
@@ -7177,7 +6973,7 @@
         </p:nvSpPr>
         <p:spPr>
           <a:xfrm>
-            <a:off x="4937760" y="2468880"/>
+            <a:off x="5212080" y="2313432"/>
             <a:ext cx="402336" cy="402336"/>
           </a:xfrm>
           <a:prstGeom prst="ellipse">
@@ -7209,7 +7005,7 @@
           <a:lstStyle/>
           <a:p>
             <a:pPr algn="ctr">
-              <a:defRPr sz="1300" b="1">
+              <a:defRPr sz="1400" b="1">
                 <a:solidFill>
                   <a:srgbClr val="FFFFFF"/>
                 </a:solidFill>
@@ -7230,8 +7026,8 @@
         </p:nvSpPr>
         <p:spPr>
           <a:xfrm>
-            <a:off x="5532120" y="2423160"/>
-            <a:ext cx="5943600" cy="594360"/>
+            <a:off x="5806440" y="2267712"/>
+            <a:ext cx="5669280" cy="685800"/>
           </a:xfrm>
           <a:prstGeom prst="rect">
             <a:avLst/>
@@ -7245,7 +7041,7 @@
           <a:lstStyle/>
           <a:p>
             <a:pPr>
-              <a:defRPr sz="1300" b="1">
+              <a:defRPr sz="1400" b="1">
                 <a:solidFill>
                   <a:srgbClr val="241C1C"/>
                 </a:solidFill>
@@ -7258,15 +7054,15 @@
           </a:p>
           <a:p>
             <a:pPr>
-              <a:defRPr sz="1000">
-                <a:solidFill>
-                  <a:srgbClr val="736964"/>
-                </a:solidFill>
-                <a:latin typeface="Inter"/>
-              </a:defRPr>
-            </a:pPr>
-            <a:r>
-              <a:t>Dual bottleneck: combinatorial packing challenge &amp; congested spatial routing</a:t>
+              <a:defRPr sz="1150">
+                <a:solidFill>
+                  <a:srgbClr val="645A55"/>
+                </a:solidFill>
+                <a:latin typeface="Inter"/>
+              </a:defRPr>
+            </a:pPr>
+            <a:r>
+              <a:t>Dual bottleneck: combinatorial packing &amp; congested routing</a:t>
             </a:r>
           </a:p>
         </p:txBody>
@@ -7279,7 +7075,7 @@
         </p:nvSpPr>
         <p:spPr>
           <a:xfrm>
-            <a:off x="4937760" y="3246120"/>
+            <a:off x="5212080" y="3118103"/>
             <a:ext cx="402336" cy="402336"/>
           </a:xfrm>
           <a:prstGeom prst="ellipse">
@@ -7311,7 +7107,7 @@
           <a:lstStyle/>
           <a:p>
             <a:pPr algn="ctr">
-              <a:defRPr sz="1300" b="1">
+              <a:defRPr sz="1400" b="1">
                 <a:solidFill>
                   <a:srgbClr val="FFFFFF"/>
                 </a:solidFill>
@@ -7332,8 +7128,8 @@
         </p:nvSpPr>
         <p:spPr>
           <a:xfrm>
-            <a:off x="5532120" y="3200400"/>
-            <a:ext cx="5943600" cy="594360"/>
+            <a:off x="5806440" y="3072384"/>
+            <a:ext cx="5669280" cy="685800"/>
           </a:xfrm>
           <a:prstGeom prst="rect">
             <a:avLst/>
@@ -7347,7 +7143,7 @@
           <a:lstStyle/>
           <a:p>
             <a:pPr>
-              <a:defRPr sz="1300" b="1">
+              <a:defRPr sz="1400" b="1">
                 <a:solidFill>
                   <a:srgbClr val="241C1C"/>
                 </a:solidFill>
@@ -7360,9 +7156,9 @@
           </a:p>
           <a:p>
             <a:pPr>
-              <a:defRPr sz="1000">
-                <a:solidFill>
-                  <a:srgbClr val="736964"/>
+              <a:defRPr sz="1150">
+                <a:solidFill>
+                  <a:srgbClr val="645A55"/>
                 </a:solidFill>
                 <a:latin typeface="Inter"/>
               </a:defRPr>
@@ -7381,7 +7177,7 @@
         </p:nvSpPr>
         <p:spPr>
           <a:xfrm>
-            <a:off x="4937760" y="4023360"/>
+            <a:off x="5212080" y="3922776"/>
             <a:ext cx="402336" cy="402336"/>
           </a:xfrm>
           <a:prstGeom prst="ellipse">
@@ -7413,7 +7209,7 @@
           <a:lstStyle/>
           <a:p>
             <a:pPr algn="ctr">
-              <a:defRPr sz="1300" b="1">
+              <a:defRPr sz="1400" b="1">
                 <a:solidFill>
                   <a:srgbClr val="FFFFFF"/>
                 </a:solidFill>
@@ -7434,8 +7230,8 @@
         </p:nvSpPr>
         <p:spPr>
           <a:xfrm>
-            <a:off x="5532120" y="3977640"/>
-            <a:ext cx="5943600" cy="594360"/>
+            <a:off x="5806440" y="3877056"/>
+            <a:ext cx="5669280" cy="685800"/>
           </a:xfrm>
           <a:prstGeom prst="rect">
             <a:avLst/>
@@ -7449,7 +7245,7 @@
           <a:lstStyle/>
           <a:p>
             <a:pPr>
-              <a:defRPr sz="1300" b="1">
+              <a:defRPr sz="1400" b="1">
                 <a:solidFill>
                   <a:srgbClr val="241C1C"/>
                 </a:solidFill>
@@ -7462,15 +7258,15 @@
           </a:p>
           <a:p>
             <a:pPr>
-              <a:defRPr sz="1000">
-                <a:solidFill>
-                  <a:srgbClr val="736964"/>
-                </a:solidFill>
-                <a:latin typeface="Inter"/>
-              </a:defRPr>
-            </a:pPr>
-            <a:r>
-              <a:t>Deep mathematical formulations of Knapsack DP, Greedy, Dijkstra &amp; Bellman-Ford</a:t>
+              <a:defRPr sz="1150">
+                <a:solidFill>
+                  <a:srgbClr val="645A55"/>
+                </a:solidFill>
+                <a:latin typeface="Inter"/>
+              </a:defRPr>
+            </a:pPr>
+            <a:r>
+              <a:t>Mathematical formulations of Knapsack, Greedy, Dijkstra &amp; Bellman-Ford</a:t>
             </a:r>
           </a:p>
         </p:txBody>
@@ -7483,7 +7279,7 @@
         </p:nvSpPr>
         <p:spPr>
           <a:xfrm>
-            <a:off x="4937760" y="4800600"/>
+            <a:off x="5212080" y="4727448"/>
             <a:ext cx="402336" cy="402336"/>
           </a:xfrm>
           <a:prstGeom prst="ellipse">
@@ -7515,7 +7311,7 @@
           <a:lstStyle/>
           <a:p>
             <a:pPr algn="ctr">
-              <a:defRPr sz="1300" b="1">
+              <a:defRPr sz="1400" b="1">
                 <a:solidFill>
                   <a:srgbClr val="FFFFFF"/>
                 </a:solidFill>
@@ -7536,8 +7332,8 @@
         </p:nvSpPr>
         <p:spPr>
           <a:xfrm>
-            <a:off x="5532120" y="4754880"/>
-            <a:ext cx="5943600" cy="594360"/>
+            <a:off x="5806440" y="4681728"/>
+            <a:ext cx="5669280" cy="685800"/>
           </a:xfrm>
           <a:prstGeom prst="rect">
             <a:avLst/>
@@ -7551,7 +7347,7 @@
           <a:lstStyle/>
           <a:p>
             <a:pPr>
-              <a:defRPr sz="1300" b="1">
+              <a:defRPr sz="1400" b="1">
                 <a:solidFill>
                   <a:srgbClr val="241C1C"/>
                 </a:solidFill>
@@ -7564,15 +7360,15 @@
           </a:p>
           <a:p>
             <a:pPr>
-              <a:defRPr sz="1000">
-                <a:solidFill>
-                  <a:srgbClr val="736964"/>
-                </a:solidFill>
-                <a:latin typeface="Inter"/>
-              </a:defRPr>
-            </a:pPr>
-            <a:r>
-              <a:t>SmartRoute dual-engine system architecture &amp; live interactive dashboard</a:t>
+              <a:defRPr sz="1150">
+                <a:solidFill>
+                  <a:srgbClr val="645A55"/>
+                </a:solidFill>
+                <a:latin typeface="Inter"/>
+              </a:defRPr>
+            </a:pPr>
+            <a:r>
+              <a:t>SmartRoute dual-engine architecture &amp; live Google Maps dashboard</a:t>
             </a:r>
           </a:p>
         </p:txBody>
@@ -7585,7 +7381,7 @@
         </p:nvSpPr>
         <p:spPr>
           <a:xfrm>
-            <a:off x="4937760" y="5577840"/>
+            <a:off x="5212080" y="5532120"/>
             <a:ext cx="402336" cy="402336"/>
           </a:xfrm>
           <a:prstGeom prst="ellipse">
@@ -7617,7 +7413,7 @@
           <a:lstStyle/>
           <a:p>
             <a:pPr algn="ctr">
-              <a:defRPr sz="1300" b="1">
+              <a:defRPr sz="1400" b="1">
                 <a:solidFill>
                   <a:srgbClr val="FFFFFF"/>
                 </a:solidFill>
@@ -7638,8 +7434,8 @@
         </p:nvSpPr>
         <p:spPr>
           <a:xfrm>
-            <a:off x="5532120" y="5532120"/>
-            <a:ext cx="5943600" cy="594360"/>
+            <a:off x="5806440" y="5486400"/>
+            <a:ext cx="5669280" cy="685800"/>
           </a:xfrm>
           <a:prstGeom prst="rect">
             <a:avLst/>
@@ -7653,7 +7449,7 @@
           <a:lstStyle/>
           <a:p>
             <a:pPr>
-              <a:defRPr sz="1300" b="1">
+              <a:defRPr sz="1400" b="1">
                 <a:solidFill>
                   <a:srgbClr val="241C1C"/>
                 </a:solidFill>
@@ -7666,43 +7462,19 @@
           </a:p>
           <a:p>
             <a:pPr>
-              <a:defRPr sz="1000">
-                <a:solidFill>
-                  <a:srgbClr val="736964"/>
-                </a:solidFill>
-                <a:latin typeface="Inter"/>
-              </a:defRPr>
-            </a:pPr>
-            <a:r>
-              <a:t>Empirical benchmark matrix, profit capture, transit efficiency &amp; viva takeaways</a:t>
-            </a:r>
-          </a:p>
-        </p:txBody>
-      </p:sp>
-      <p:pic>
-        <p:nvPicPr>
-          <p:cNvPr id="16" name="Picture 15" descr="gradient_slim_pill.png"/>
-          <p:cNvPicPr>
-            <a:picLocks noChangeAspect="1"/>
-          </p:cNvPicPr>
-          <p:nvPr/>
-        </p:nvPicPr>
-        <p:blipFill>
-          <a:blip r:embed="rId3"/>
-          <a:stretch>
-            <a:fillRect/>
-          </a:stretch>
-        </p:blipFill>
-        <p:spPr>
-          <a:xfrm>
-            <a:off x="11612880" y="685800"/>
-            <a:ext cx="164592" cy="5486400"/>
-          </a:xfrm>
-          <a:prstGeom prst="rect">
-            <a:avLst/>
-          </a:prstGeom>
-        </p:spPr>
-      </p:pic>
+              <a:defRPr sz="1150">
+                <a:solidFill>
+                  <a:srgbClr val="645A55"/>
+                </a:solidFill>
+                <a:latin typeface="Inter"/>
+              </a:defRPr>
+            </a:pPr>
+            <a:r>
+              <a:t>Empirical benchmark matrix, distance savings &amp; viva defense</a:t>
+            </a:r>
+          </a:p>
+        </p:txBody>
+      </p:sp>
     </p:spTree>
   </p:cSld>
   <p:clrMapOvr>
@@ -7737,8 +7509,8 @@
         </p:nvSpPr>
         <p:spPr>
           <a:xfrm>
-            <a:off x="731520" y="731520"/>
-            <a:ext cx="2560320" cy="347472"/>
+            <a:off x="731520" y="548640"/>
+            <a:ext cx="2743200" cy="384048"/>
           </a:xfrm>
           <a:prstGeom prst="roundRect">
             <a:avLst/>
@@ -7765,11 +7537,11 @@
           </a:fontRef>
         </p:style>
         <p:txBody>
-          <a:bodyPr rtlCol="0" anchor="ctr" wrap="none" lIns="109728" rIns="109728" tIns="36576" bIns="36576"/>
+          <a:bodyPr rtlCol="0" anchor="ctr" wrap="none" lIns="128016" rIns="128016" tIns="36576" bIns="36576"/>
           <a:lstStyle/>
           <a:p>
             <a:pPr algn="ctr">
-              <a:defRPr sz="950" b="1">
+              <a:defRPr sz="1100" b="1">
                 <a:solidFill>
                   <a:srgbClr val="FFFFFF"/>
                 </a:solidFill>
@@ -7790,8 +7562,8 @@
         </p:nvSpPr>
         <p:spPr>
           <a:xfrm>
-            <a:off x="731520" y="1280160"/>
-            <a:ext cx="5669280" cy="1371600"/>
+            <a:off x="731520" y="1051560"/>
+            <a:ext cx="5669280" cy="731520"/>
           </a:xfrm>
           <a:prstGeom prst="rect">
             <a:avLst/>
@@ -7805,7 +7577,7 @@
           <a:lstStyle/>
           <a:p>
             <a:pPr>
-              <a:defRPr sz="4400" b="1">
+              <a:defRPr sz="3800" b="1">
                 <a:solidFill>
                   <a:srgbClr val="241C1C"/>
                 </a:solidFill>
@@ -7813,11 +7585,7 @@
               </a:defRPr>
             </a:pPr>
             <a:r>
-              <a:t>WHAT IS</a:t>
-            </a:r>
-            <a:br/>
-            <a:r>
-              <a:t>SMARTROUTE?</a:t>
+              <a:t>WHAT IS SMARTROUTE?</a:t>
             </a:r>
           </a:p>
         </p:txBody>
@@ -7830,8 +7598,8 @@
         </p:nvSpPr>
         <p:spPr>
           <a:xfrm>
-            <a:off x="731520" y="2926080"/>
-            <a:ext cx="5852160" cy="1097280"/>
+            <a:off x="731520" y="1920240"/>
+            <a:ext cx="5486400" cy="4389120"/>
           </a:xfrm>
           <a:prstGeom prst="rect">
             <a:avLst/>
@@ -7845,6 +7613,20 @@
           <a:lstStyle/>
           <a:p>
             <a:pPr>
+              <a:defRPr sz="1400" b="1">
+                <a:solidFill>
+                  <a:srgbClr val="E85923"/>
+                </a:solidFill>
+                <a:latin typeface="Inter"/>
+              </a:defRPr>
+            </a:pPr>
+            <a:r>
+              <a:t>BRIDGING CLASSICAL DAA PARADIGMS WITH REAL-WORLD LOGISTICS OPTIMIZATION</a:t>
+            </a:r>
+          </a:p>
+          <a:p>
+            <a:br/>
+            <a:pPr>
               <a:defRPr sz="1300" b="1">
                 <a:solidFill>
                   <a:srgbClr val="241C1C"/>
@@ -7853,35 +7635,26 @@
               </a:defRPr>
             </a:pPr>
             <a:r>
-              <a:t>BRIDGING CLASSICAL DATA STRUCTURES WITH REAL-WORLD LOGISTICS OPTIMIZATION ACROSS HYDERABAD'S URBAN CORRIDORS.</a:t>
-            </a:r>
-          </a:p>
-        </p:txBody>
-      </p:sp>
-      <p:sp>
-        <p:nvSpPr>
-          <p:cNvPr id="5" name="TextBox 4"/>
-          <p:cNvSpPr txBox="1"/>
-          <p:nvPr/>
-        </p:nvSpPr>
-        <p:spPr>
-          <a:xfrm>
-            <a:off x="731520" y="4114800"/>
-            <a:ext cx="5852160" cy="2011680"/>
-          </a:xfrm>
-          <a:prstGeom prst="rect">
-            <a:avLst/>
-          </a:prstGeom>
-          <a:noFill/>
-        </p:spPr>
-        <p:txBody>
-          <a:bodyPr wrap="square">
-            <a:spAutoFit/>
-          </a:bodyPr>
-          <a:lstStyle/>
-          <a:p>
-            <a:pPr>
-              <a:defRPr sz="1100">
+              <a:t>• Last-Mile Significance:</a:t>
+            </a:r>
+          </a:p>
+          <a:p>
+            <a:pPr>
+              <a:defRPr sz="1200">
+                <a:solidFill>
+                  <a:srgbClr val="645A55"/>
+                </a:solidFill>
+                <a:latin typeface="Inter"/>
+              </a:defRPr>
+            </a:pPr>
+            <a:r>
+              <a:t>Accounts for over 53% of total delivery logistics expenditure in urban supply chains.</a:t>
+            </a:r>
+          </a:p>
+          <a:p>
+            <a:br/>
+            <a:pPr>
+              <a:defRPr sz="1300" b="1">
                 <a:solidFill>
                   <a:srgbClr val="241C1C"/>
                 </a:solidFill>
@@ -7889,27 +7662,126 @@
               </a:defRPr>
             </a:pPr>
             <a:r>
-              <a:t>In modern e-commerce delivery networks, last-mile logistics accounts for over 53% of overall supply-chain expenditures. SmartRoute models this high-stakes domain through four rigorous DAA paradigms studied in our coursework:</a:t>
-            </a:r>
+              <a:t>• Real-World Complexity:</a:t>
+            </a:r>
+          </a:p>
+          <a:p>
+            <a:pPr>
+              <a:defRPr sz="1200">
+                <a:solidFill>
+                  <a:srgbClr val="645A55"/>
+                </a:solidFill>
+                <a:latin typeface="Inter"/>
+              </a:defRPr>
+            </a:pPr>
+            <a:r>
+              <a:t>Managing 35+ demand locations across Hyderabad (Begumpet, HITEC City, Gachibowli, Secunderabad, Woxsen University).</a:t>
+            </a:r>
+          </a:p>
+          <a:p>
             <a:br/>
+            <a:pPr>
+              <a:defRPr sz="1300" b="1">
+                <a:solidFill>
+                  <a:srgbClr val="241C1C"/>
+                </a:solidFill>
+                <a:latin typeface="Inter"/>
+              </a:defRPr>
+            </a:pPr>
+            <a:r>
+              <a:t>• Academic Focus:</a:t>
+            </a:r>
+          </a:p>
+          <a:p>
+            <a:pPr>
+              <a:defRPr sz="1200">
+                <a:solidFill>
+                  <a:srgbClr val="645A55"/>
+                </a:solidFill>
+                <a:latin typeface="Inter"/>
+              </a:defRPr>
+            </a:pPr>
+            <a:r>
+              <a:t>Benchmarking discrete optimization (0/1 Knapsack &amp; Greedy) against shortest path graph algorithms (Dijkstra &amp; Bellman-Ford).</a:t>
+            </a:r>
+          </a:p>
+          <a:p>
             <a:br/>
-            <a:r>
-              <a:t>• Discrete Knapsack Optimization: Maximizing payload revenue under strict vehicle payload boundaries.</a:t>
-            </a:r>
-            <a:br/>
-            <a:r>
-              <a:t>• Heuristic Greedy Scheduling: Evaluating rapid priority approximations versus optimal formulations.</a:t>
-            </a:r>
-            <a:br/>
-            <a:r>
-              <a:t>• Single-Source Shortest Paths: Comparing Dijkstra's Min-Heap graph navigation with Bellman-Ford's dynamic edge relaxation and congestion arbitrage.</a:t>
-            </a:r>
+            <a:pPr>
+              <a:defRPr sz="1300" b="1">
+                <a:solidFill>
+                  <a:srgbClr val="241C1C"/>
+                </a:solidFill>
+                <a:latin typeface="Inter"/>
+              </a:defRPr>
+            </a:pPr>
+            <a:r>
+              <a:t>• Production Deliverable:</a:t>
+            </a:r>
+          </a:p>
+          <a:p>
+            <a:pPr>
+              <a:defRPr sz="1200">
+                <a:solidFill>
+                  <a:srgbClr val="645A55"/>
+                </a:solidFill>
+                <a:latin typeface="Inter"/>
+              </a:defRPr>
+            </a:pPr>
+            <a:r>
+              <a:t>A live interactive dashboard with step-by-step Min-Heap playback and 2D DP cell inspection.</a:t>
+            </a:r>
+          </a:p>
+        </p:txBody>
+      </p:sp>
+      <p:sp>
+        <p:nvSpPr>
+          <p:cNvPr id="5" name="Rounded Rectangle 4"/>
+          <p:cNvSpPr/>
+          <p:nvPr/>
+        </p:nvSpPr>
+        <p:spPr>
+          <a:xfrm>
+            <a:off x="6492240" y="1051560"/>
+            <a:ext cx="4937760" cy="5212080"/>
+          </a:xfrm>
+          <a:prstGeom prst="roundRect">
+            <a:avLst/>
+          </a:prstGeom>
+          <a:solidFill>
+            <a:srgbClr val="FFFFFF"/>
+          </a:solidFill>
+          <a:ln>
+            <a:solidFill>
+              <a:srgbClr val="D7D0C6"/>
+            </a:solidFill>
+          </a:ln>
+        </p:spPr>
+        <p:style>
+          <a:lnRef idx="1">
+            <a:schemeClr val="accent1"/>
+          </a:lnRef>
+          <a:fillRef idx="3">
+            <a:schemeClr val="accent1"/>
+          </a:fillRef>
+          <a:effectRef idx="2">
+            <a:schemeClr val="accent1"/>
+          </a:effectRef>
+          <a:fontRef idx="minor">
+            <a:schemeClr val="lt1"/>
+          </a:fontRef>
+        </p:style>
+        <p:txBody>
+          <a:bodyPr rtlCol="0" anchor="ctr"/>
+          <a:lstStyle/>
+          <a:p>
+            <a:pPr algn="ctr"/>
           </a:p>
         </p:txBody>
       </p:sp>
       <p:pic>
         <p:nvPicPr>
-          <p:cNvPr id="6" name="Picture 5" descr="gradient_vertical_coral.png"/>
+          <p:cNvPr id="6" name="Picture 5" descr="operations_overview.png"/>
           <p:cNvPicPr>
             <a:picLocks noChangeAspect="1"/>
           </p:cNvPicPr>
@@ -7923,14 +7795,50 @@
         </p:blipFill>
         <p:spPr>
           <a:xfrm>
-            <a:off x="7040880" y="685800"/>
-            <a:ext cx="4389120" cy="5486400"/>
+            <a:off x="6675120" y="1234440"/>
+            <a:ext cx="4572000" cy="4389120"/>
           </a:xfrm>
           <a:prstGeom prst="rect">
             <a:avLst/>
           </a:prstGeom>
         </p:spPr>
       </p:pic>
+      <p:sp>
+        <p:nvSpPr>
+          <p:cNvPr id="7" name="TextBox 6"/>
+          <p:cNvSpPr txBox="1"/>
+          <p:nvPr/>
+        </p:nvSpPr>
+        <p:spPr>
+          <a:xfrm>
+            <a:off x="6675120" y="5715000"/>
+            <a:ext cx="4572000" cy="457200"/>
+          </a:xfrm>
+          <a:prstGeom prst="rect">
+            <a:avLst/>
+          </a:prstGeom>
+          <a:noFill/>
+        </p:spPr>
+        <p:txBody>
+          <a:bodyPr wrap="none">
+            <a:spAutoFit/>
+          </a:bodyPr>
+          <a:lstStyle/>
+          <a:p>
+            <a:pPr algn="ctr">
+              <a:defRPr sz="1100" b="1">
+                <a:solidFill>
+                  <a:srgbClr val="241C1C"/>
+                </a:solidFill>
+                <a:latin typeface="Inter"/>
+              </a:defRPr>
+            </a:pPr>
+            <a:r>
+              <a:t>Live Interactive Google Maps Interface (Hyderabad Network)</a:t>
+            </a:r>
+          </a:p>
+        </p:txBody>
+      </p:sp>
     </p:spTree>
   </p:cSld>
   <p:clrMapOvr>
@@ -7966,7 +7874,7 @@
         <p:spPr>
           <a:xfrm>
             <a:off x="731520" y="548640"/>
-            <a:ext cx="2560320" cy="347472"/>
+            <a:ext cx="2743200" cy="384048"/>
           </a:xfrm>
           <a:prstGeom prst="roundRect">
             <a:avLst/>
@@ -7993,11 +7901,11 @@
           </a:fontRef>
         </p:style>
         <p:txBody>
-          <a:bodyPr rtlCol="0" anchor="ctr" wrap="none" lIns="109728" rIns="109728" tIns="36576" bIns="36576"/>
+          <a:bodyPr rtlCol="0" anchor="ctr" wrap="none" lIns="128016" rIns="128016" tIns="36576" bIns="36576"/>
           <a:lstStyle/>
           <a:p>
             <a:pPr algn="ctr">
-              <a:defRPr sz="950" b="1">
+              <a:defRPr sz="1100" b="1">
                 <a:solidFill>
                   <a:srgbClr val="FFFFFF"/>
                 </a:solidFill>
@@ -8018,8 +7926,8 @@
         </p:nvSpPr>
         <p:spPr>
           <a:xfrm>
-            <a:off x="731520" y="960120"/>
-            <a:ext cx="5029200" cy="640080"/>
+            <a:off x="731520" y="1005840"/>
+            <a:ext cx="10698480" cy="640080"/>
           </a:xfrm>
           <a:prstGeom prst="rect">
             <a:avLst/>
@@ -8033,7 +7941,7 @@
           <a:lstStyle/>
           <a:p>
             <a:pPr>
-              <a:defRPr sz="3200" b="1">
+              <a:defRPr sz="3400" b="1">
                 <a:solidFill>
                   <a:srgbClr val="241C1C"/>
                 </a:solidFill>
@@ -8041,81 +7949,21 @@
               </a:defRPr>
             </a:pPr>
             <a:r>
-              <a:t>THE FOUR DAA PILLARS</a:t>
-            </a:r>
-          </a:p>
-        </p:txBody>
-      </p:sp>
-      <p:sp>
-        <p:nvSpPr>
-          <p:cNvPr id="4" name="TextBox 3"/>
-          <p:cNvSpPr txBox="1"/>
-          <p:nvPr/>
-        </p:nvSpPr>
-        <p:spPr>
-          <a:xfrm>
-            <a:off x="5669280" y="960120"/>
-            <a:ext cx="5760720" cy="640080"/>
-          </a:xfrm>
-          <a:prstGeom prst="rect">
-            <a:avLst/>
-          </a:prstGeom>
-          <a:noFill/>
-        </p:spPr>
-        <p:txBody>
-          <a:bodyPr wrap="square">
-            <a:spAutoFit/>
-          </a:bodyPr>
-          <a:lstStyle/>
-          <a:p>
-            <a:pPr>
-              <a:defRPr sz="1100" b="1">
-                <a:solidFill>
-                  <a:srgbClr val="241C1C"/>
-                </a:solidFill>
-                <a:latin typeface="Inter"/>
-              </a:defRPr>
-            </a:pPr>
-            <a:r>
-              <a:t>A SYSTEMATIC COMPARISON OF DYNAMIC PROGRAMMING, GREEDY CHOICE, AND SHORTEST-PATH GRAPH ALGORITHMS IN LAST-MILE LOGISTICS.</a:t>
-            </a:r>
-          </a:p>
-        </p:txBody>
-      </p:sp>
-      <p:pic>
-        <p:nvPicPr>
-          <p:cNvPr id="5" name="Picture 4" descr="gradient_horizontal_banner.png"/>
-          <p:cNvPicPr>
-            <a:picLocks noChangeAspect="1"/>
-          </p:cNvPicPr>
-          <p:nvPr/>
-        </p:nvPicPr>
-        <p:blipFill>
-          <a:blip r:embed="rId2"/>
-          <a:stretch>
-            <a:fillRect/>
-          </a:stretch>
-        </p:blipFill>
-        <p:spPr>
-          <a:xfrm>
-            <a:off x="731520" y="1691640"/>
-            <a:ext cx="10728655" cy="2377440"/>
-          </a:xfrm>
-          <a:prstGeom prst="rect">
-            <a:avLst/>
-          </a:prstGeom>
-        </p:spPr>
-      </p:pic>
-      <p:sp>
-        <p:nvSpPr>
-          <p:cNvPr id="6" name="Rounded Rectangle 5"/>
+              <a:t>THE FOUR CORE DAA PILLARS</a:t>
+            </a:r>
+          </a:p>
+        </p:txBody>
+      </p:sp>
+      <p:sp>
+        <p:nvSpPr>
+          <p:cNvPr id="4" name="Rounded Rectangle 3"/>
           <p:cNvSpPr/>
           <p:nvPr/>
         </p:nvSpPr>
         <p:spPr>
           <a:xfrm>
-            <a:off x="914400" y="1874519"/>
-            <a:ext cx="2468880" cy="2011680"/>
+            <a:off x="731520" y="1737360"/>
+            <a:ext cx="2468880" cy="4572000"/>
           </a:xfrm>
           <a:prstGeom prst="roundRect">
             <a:avLst/>
@@ -8144,59 +7992,81 @@
           </a:fontRef>
         </p:style>
         <p:txBody>
-          <a:bodyPr rtlCol="0" anchor="ctr" wrap="square" lIns="137160" rIns="137160" tIns="164592"/>
+          <a:bodyPr rtlCol="0" anchor="ctr" wrap="square" lIns="164592" rIns="164592" tIns="201168"/>
           <a:lstStyle/>
           <a:p>
             <a:pPr algn="ctr">
+              <a:defRPr sz="1500" b="1">
+                <a:solidFill>
+                  <a:srgbClr val="241C1C"/>
+                </a:solidFill>
+                <a:latin typeface="Inter"/>
+              </a:defRPr>
+            </a:pPr>
+            <a:r>
+              <a:t>01. KNAPSACK (DP)</a:t>
+            </a:r>
+          </a:p>
+          <a:p>
+            <a:pPr>
               <a:defRPr sz="1100" b="1">
                 <a:solidFill>
+                  <a:srgbClr val="E85923"/>
+                </a:solidFill>
+                <a:latin typeface="Inter"/>
+              </a:defRPr>
+            </a:pPr>
+            <a:r>
+              <a:t>Complexity: O(n · W) Pseudo-poly</a:t>
+            </a:r>
+          </a:p>
+          <a:p>
+            <a:pPr>
+              <a:defRPr sz="1100" b="1">
+                <a:solidFill>
+                  <a:srgbClr val="4D7C0F"/>
+                </a:solidFill>
+                <a:latin typeface="Inter"/>
+              </a:defRPr>
+            </a:pPr>
+            <a:r>
+              <a:t>Paradigm: Global Optimum</a:t>
+            </a:r>
+          </a:p>
+          <a:p>
+            <a:br/>
+            <a:pPr>
+              <a:defRPr sz="1200">
+                <a:solidFill>
                   <a:srgbClr val="241C1C"/>
                 </a:solidFill>
                 <a:latin typeface="Inter"/>
               </a:defRPr>
             </a:pPr>
             <a:r>
-              <a:t>01. KNAPSACK (DP)</a:t>
-            </a:r>
-          </a:p>
-          <a:p>
-            <a:pPr>
-              <a:defRPr sz="850" b="1">
-                <a:solidFill>
-                  <a:srgbClr val="E85923"/>
-                </a:solidFill>
-                <a:latin typeface="Inter"/>
-              </a:defRPr>
-            </a:pPr>
-            <a:r>
-              <a:t>BELLMAN 2D MEMOIZATION</a:t>
-            </a:r>
-          </a:p>
-          <a:p>
-            <a:pPr>
-              <a:defRPr sz="950">
-                <a:solidFill>
-                  <a:srgbClr val="241C1C"/>
-                </a:solidFill>
-                <a:latin typeface="Inter"/>
-              </a:defRPr>
-            </a:pPr>
-            <a:r>
-              <a:t>Guarantees mathematically optimal order selection within payload limit W in O(n · W) pseudo-polynomial time.</a:t>
-            </a:r>
-          </a:p>
-        </p:txBody>
-      </p:sp>
-      <p:sp>
-        <p:nvSpPr>
-          <p:cNvPr id="7" name="Rounded Rectangle 6"/>
+              <a:t>• Solves discrete 0/1 order selection within payload limit W.</a:t>
+            </a:r>
+            <a:br/>
+            <a:r>
+              <a:t>• 2D memoization table guarantees zero wasted space.</a:t>
+            </a:r>
+            <a:br/>
+            <a:r>
+              <a:t>• Backtracking golden trail identifies exact parcel bundle.</a:t>
+            </a:r>
+          </a:p>
+        </p:txBody>
+      </p:sp>
+      <p:sp>
+        <p:nvSpPr>
+          <p:cNvPr id="5" name="Rounded Rectangle 4"/>
           <p:cNvSpPr/>
           <p:nvPr/>
         </p:nvSpPr>
         <p:spPr>
           <a:xfrm>
-            <a:off x="3602736" y="1874519"/>
-            <a:ext cx="2468880" cy="2011680"/>
+            <a:off x="3429000" y="1737360"/>
+            <a:ext cx="2468880" cy="4572000"/>
           </a:xfrm>
           <a:prstGeom prst="roundRect">
             <a:avLst/>
@@ -8225,59 +8095,81 @@
           </a:fontRef>
         </p:style>
         <p:txBody>
-          <a:bodyPr rtlCol="0" anchor="ctr" wrap="square" lIns="137160" rIns="137160" tIns="164592"/>
+          <a:bodyPr rtlCol="0" anchor="ctr" wrap="square" lIns="164592" rIns="164592" tIns="201168"/>
           <a:lstStyle/>
           <a:p>
             <a:pPr algn="ctr">
+              <a:defRPr sz="1500" b="1">
+                <a:solidFill>
+                  <a:srgbClr val="241C1C"/>
+                </a:solidFill>
+                <a:latin typeface="Inter"/>
+              </a:defRPr>
+            </a:pPr>
+            <a:r>
+              <a:t>02. GREEDY HEURISTICS</a:t>
+            </a:r>
+          </a:p>
+          <a:p>
+            <a:pPr>
               <a:defRPr sz="1100" b="1">
                 <a:solidFill>
+                  <a:srgbClr val="E85923"/>
+                </a:solidFill>
+                <a:latin typeface="Inter"/>
+              </a:defRPr>
+            </a:pPr>
+            <a:r>
+              <a:t>Complexity: O(n log n) Sort Time</a:t>
+            </a:r>
+          </a:p>
+          <a:p>
+            <a:pPr>
+              <a:defRPr sz="1100" b="1">
+                <a:solidFill>
+                  <a:srgbClr val="4D7C0F"/>
+                </a:solidFill>
+                <a:latin typeface="Inter"/>
+              </a:defRPr>
+            </a:pPr>
+            <a:r>
+              <a:t>Paradigm: Fast Approximation</a:t>
+            </a:r>
+          </a:p>
+          <a:p>
+            <a:br/>
+            <a:pPr>
+              <a:defRPr sz="1200">
+                <a:solidFill>
                   <a:srgbClr val="241C1C"/>
                 </a:solidFill>
                 <a:latin typeface="Inter"/>
               </a:defRPr>
             </a:pPr>
             <a:r>
-              <a:t>02. GREEDY HEURISTICS</a:t>
-            </a:r>
-          </a:p>
-          <a:p>
-            <a:pPr>
-              <a:defRPr sz="850" b="1">
-                <a:solidFill>
-                  <a:srgbClr val="E85923"/>
-                </a:solidFill>
-                <a:latin typeface="Inter"/>
-              </a:defRPr>
-            </a:pPr>
-            <a:r>
-              <a:t>LOCAL CHOICE SORTING</a:t>
-            </a:r>
-          </a:p>
-          <a:p>
-            <a:pPr>
-              <a:defRPr sz="950">
-                <a:solidFill>
-                  <a:srgbClr val="241C1C"/>
-                </a:solidFill>
-                <a:latin typeface="Inter"/>
-              </a:defRPr>
-            </a:pPr>
-            <a:r>
-              <a:t>Ultra-fast O(n log n) parcel scheduling by Profit Density (₹/kg), Earliest Deadline, and Highest Absolute Value.</a:t>
-            </a:r>
-          </a:p>
-        </p:txBody>
-      </p:sp>
-      <p:sp>
-        <p:nvSpPr>
-          <p:cNvPr id="8" name="Rounded Rectangle 7"/>
+              <a:t>• Priority sorting by Profit Density (Rs./kg), Deadline, Profit.</a:t>
+            </a:r>
+            <a:br/>
+            <a:r>
+              <a:t>• Fast heuristic execution in under 0.5 ms.</a:t>
+            </a:r>
+            <a:br/>
+            <a:r>
+              <a:t>• Prone to greedy traps for integer discrete cargo.</a:t>
+            </a:r>
+          </a:p>
+        </p:txBody>
+      </p:sp>
+      <p:sp>
+        <p:nvSpPr>
+          <p:cNvPr id="6" name="Rounded Rectangle 5"/>
           <p:cNvSpPr/>
           <p:nvPr/>
         </p:nvSpPr>
         <p:spPr>
           <a:xfrm>
-            <a:off x="6291072" y="1874519"/>
-            <a:ext cx="2468880" cy="2011680"/>
+            <a:off x="6126480" y="1737360"/>
+            <a:ext cx="2468880" cy="4572000"/>
           </a:xfrm>
           <a:prstGeom prst="roundRect">
             <a:avLst/>
@@ -8306,59 +8198,81 @@
           </a:fontRef>
         </p:style>
         <p:txBody>
-          <a:bodyPr rtlCol="0" anchor="ctr" wrap="square" lIns="137160" rIns="137160" tIns="164592"/>
+          <a:bodyPr rtlCol="0" anchor="ctr" wrap="square" lIns="164592" rIns="164592" tIns="201168"/>
           <a:lstStyle/>
           <a:p>
             <a:pPr algn="ctr">
+              <a:defRPr sz="1500" b="1">
+                <a:solidFill>
+                  <a:srgbClr val="241C1C"/>
+                </a:solidFill>
+                <a:latin typeface="Inter"/>
+              </a:defRPr>
+            </a:pPr>
+            <a:r>
+              <a:t>03. DIJKSTRA SSSP</a:t>
+            </a:r>
+          </a:p>
+          <a:p>
+            <a:pPr>
               <a:defRPr sz="1100" b="1">
                 <a:solidFill>
+                  <a:srgbClr val="E85923"/>
+                </a:solidFill>
+                <a:latin typeface="Inter"/>
+              </a:defRPr>
+            </a:pPr>
+            <a:r>
+              <a:t>Complexity: O((V + E) log V)</a:t>
+            </a:r>
+          </a:p>
+          <a:p>
+            <a:pPr>
+              <a:defRPr sz="1100" b="1">
+                <a:solidFill>
+                  <a:srgbClr val="4D7C0F"/>
+                </a:solidFill>
+                <a:latin typeface="Inter"/>
+              </a:defRPr>
+            </a:pPr>
+            <a:r>
+              <a:t>Paradigm: Single-Source Shortest</a:t>
+            </a:r>
+          </a:p>
+          <a:p>
+            <a:br/>
+            <a:pPr>
+              <a:defRPr sz="1200">
+                <a:solidFill>
                   <a:srgbClr val="241C1C"/>
                 </a:solidFill>
                 <a:latin typeface="Inter"/>
               </a:defRPr>
             </a:pPr>
             <a:r>
-              <a:t>03. DIJKSTRA'S SSSP</a:t>
-            </a:r>
-          </a:p>
-          <a:p>
-            <a:pPr>
-              <a:defRPr sz="850" b="1">
-                <a:solidFill>
-                  <a:srgbClr val="E85923"/>
-                </a:solidFill>
-                <a:latin typeface="Inter"/>
-              </a:defRPr>
-            </a:pPr>
-            <a:r>
-              <a:t>MIN-HEAP PRIORITY QUEUE</a:t>
-            </a:r>
-          </a:p>
-          <a:p>
-            <a:pPr>
-              <a:defRPr sz="950">
-                <a:solidFill>
-                  <a:srgbClr val="241C1C"/>
-                </a:solidFill>
-                <a:latin typeface="Inter"/>
-              </a:defRPr>
-            </a:pPr>
-            <a:r>
-              <a:t>Rapid greedy edge traversal across Hyderabad's road network in O((V + E) log V) for non-negative road distances.</a:t>
-            </a:r>
-          </a:p>
-        </p:txBody>
-      </p:sp>
-      <p:sp>
-        <p:nvSpPr>
-          <p:cNvPr id="9" name="Rounded Rectangle 8"/>
+              <a:t>• Custom Binary Min-Heap Priority Queue implementation.</a:t>
+            </a:r>
+            <a:br/>
+            <a:r>
+              <a:t>• Invariant: Greedily finalizes vertex with minimum tentative dist.</a:t>
+            </a:r>
+            <a:br/>
+            <a:r>
+              <a:t>• Optimal routing across non-negative urban road networks.</a:t>
+            </a:r>
+          </a:p>
+        </p:txBody>
+      </p:sp>
+      <p:sp>
+        <p:nvSpPr>
+          <p:cNvPr id="7" name="Rounded Rectangle 6"/>
           <p:cNvSpPr/>
           <p:nvPr/>
         </p:nvSpPr>
         <p:spPr>
           <a:xfrm>
-            <a:off x="8979408" y="1874519"/>
-            <a:ext cx="2468880" cy="2011680"/>
+            <a:off x="8823960" y="1737360"/>
+            <a:ext cx="2468880" cy="4572000"/>
           </a:xfrm>
           <a:prstGeom prst="roundRect">
             <a:avLst/>
@@ -8387,117 +8301,67 @@
           </a:fontRef>
         </p:style>
         <p:txBody>
-          <a:bodyPr rtlCol="0" anchor="ctr" wrap="square" lIns="137160" rIns="137160" tIns="164592"/>
+          <a:bodyPr rtlCol="0" anchor="ctr" wrap="square" lIns="164592" rIns="164592" tIns="201168"/>
           <a:lstStyle/>
           <a:p>
             <a:pPr algn="ctr">
+              <a:defRPr sz="1500" b="1">
+                <a:solidFill>
+                  <a:srgbClr val="241C1C"/>
+                </a:solidFill>
+                <a:latin typeface="Inter"/>
+              </a:defRPr>
+            </a:pPr>
+            <a:r>
+              <a:t>04. BELLMAN-FORD</a:t>
+            </a:r>
+          </a:p>
+          <a:p>
+            <a:pPr>
               <a:defRPr sz="1100" b="1">
                 <a:solidFill>
+                  <a:srgbClr val="E85923"/>
+                </a:solidFill>
+                <a:latin typeface="Inter"/>
+              </a:defRPr>
+            </a:pPr>
+            <a:r>
+              <a:t>Complexity: O(V · E) Iterative DP</a:t>
+            </a:r>
+          </a:p>
+          <a:p>
+            <a:pPr>
+              <a:defRPr sz="1100" b="1">
+                <a:solidFill>
+                  <a:srgbClr val="4D7C0F"/>
+                </a:solidFill>
+                <a:latin typeface="Inter"/>
+              </a:defRPr>
+            </a:pPr>
+            <a:r>
+              <a:t>Paradigm: Dynamic Edge Relaxation</a:t>
+            </a:r>
+          </a:p>
+          <a:p>
+            <a:br/>
+            <a:pPr>
+              <a:defRPr sz="1200">
+                <a:solidFill>
                   <a:srgbClr val="241C1C"/>
                 </a:solidFill>
                 <a:latin typeface="Inter"/>
               </a:defRPr>
             </a:pPr>
             <a:r>
-              <a:t>04. BELLMAN-FORD</a:t>
-            </a:r>
-          </a:p>
-          <a:p>
-            <a:pPr>
-              <a:defRPr sz="850" b="1">
-                <a:solidFill>
-                  <a:srgbClr val="E85923"/>
-                </a:solidFill>
-                <a:latin typeface="Inter"/>
-              </a:defRPr>
-            </a:pPr>
-            <a:r>
-              <a:t>DP EDGE RELAXATION</a:t>
-            </a:r>
-          </a:p>
-          <a:p>
-            <a:pPr>
-              <a:defRPr sz="950">
-                <a:solidFill>
-                  <a:srgbClr val="241C1C"/>
-                </a:solidFill>
-                <a:latin typeface="Inter"/>
-              </a:defRPr>
-            </a:pPr>
-            <a:r>
-              <a:t>Robust path optimization in O(V · E); detects negative penalty cycles, congestion toll rebates, and deadlock loops.</a:t>
-            </a:r>
-          </a:p>
-        </p:txBody>
-      </p:sp>
-      <p:sp>
-        <p:nvSpPr>
-          <p:cNvPr id="10" name="TextBox 9"/>
-          <p:cNvSpPr txBox="1"/>
-          <p:nvPr/>
-        </p:nvSpPr>
-        <p:spPr>
-          <a:xfrm>
-            <a:off x="731520" y="4297680"/>
-            <a:ext cx="5029200" cy="548640"/>
-          </a:xfrm>
-          <a:prstGeom prst="rect">
-            <a:avLst/>
-          </a:prstGeom>
-          <a:noFill/>
-        </p:spPr>
-        <p:txBody>
-          <a:bodyPr wrap="none">
-            <a:spAutoFit/>
-          </a:bodyPr>
-          <a:lstStyle/>
-          <a:p>
-            <a:pPr>
-              <a:defRPr sz="2200" b="1">
-                <a:solidFill>
-                  <a:srgbClr val="241C1C"/>
-                </a:solidFill>
-                <a:latin typeface="The Seasons"/>
-              </a:defRPr>
-            </a:pPr>
-            <a:r>
-              <a:t>RESEARCH METHODOLOGY</a:t>
-            </a:r>
-          </a:p>
-        </p:txBody>
-      </p:sp>
-      <p:sp>
-        <p:nvSpPr>
-          <p:cNvPr id="11" name="TextBox 10"/>
-          <p:cNvSpPr txBox="1"/>
-          <p:nvPr/>
-        </p:nvSpPr>
-        <p:spPr>
-          <a:xfrm>
-            <a:off x="5669280" y="4297680"/>
-            <a:ext cx="5760720" cy="2011680"/>
-          </a:xfrm>
-          <a:prstGeom prst="rect">
-            <a:avLst/>
-          </a:prstGeom>
-          <a:noFill/>
-        </p:spPr>
-        <p:txBody>
-          <a:bodyPr wrap="square">
-            <a:spAutoFit/>
-          </a:bodyPr>
-          <a:lstStyle/>
-          <a:p>
-            <a:pPr>
-              <a:defRPr sz="1100">
-                <a:solidFill>
-                  <a:srgbClr val="241C1C"/>
-                </a:solidFill>
-                <a:latin typeface="Inter"/>
-              </a:defRPr>
-            </a:pPr>
-            <a:r>
-              <a:t>Rather than viewing these algorithms as disjoint theoretical concepts, SmartRoute establishes a direct comparative testbed. We evaluate their mathematical correctness, empirical runtime latency, memory footprints, and practical dispatch efficacy across 35+ customer locations throughout Hyderabad.</a:t>
+              <a:t>• Relaxes all |E| edges for |V|-1 iterations.</a:t>
+            </a:r>
+            <a:br/>
+            <a:r>
+              <a:t>• Models congestion penalties, toll rebates &amp; detours.</a:t>
+            </a:r>
+            <a:br/>
+            <a:r>
+              <a:t>• Detects negative-weight loops preventing routing anomalies.</a:t>
             </a:r>
           </a:p>
         </p:txBody>
@@ -8530,7 +8394,7 @@
       <p:grpSpPr/>
       <p:pic>
         <p:nvPicPr>
-          <p:cNvPr id="2" name="Picture 1" descr="gradient_vertical_lime.png"/>
+          <p:cNvPr id="2" name="Picture 1" descr="urban_problem_visual.png"/>
           <p:cNvPicPr>
             <a:picLocks noChangeAspect="1"/>
           </p:cNvPicPr>
@@ -8544,8 +8408,8 @@
         </p:blipFill>
         <p:spPr>
           <a:xfrm>
-            <a:off x="731520" y="685800"/>
-            <a:ext cx="3840480" cy="5486400"/>
+            <a:off x="731520" y="594360"/>
+            <a:ext cx="4114800" cy="5623560"/>
           </a:xfrm>
           <a:prstGeom prst="rect">
             <a:avLst/>
@@ -8560,8 +8424,8 @@
         </p:nvSpPr>
         <p:spPr>
           <a:xfrm>
-            <a:off x="5029200" y="685800"/>
-            <a:ext cx="2926080" cy="347472"/>
+            <a:off x="5212080" y="594360"/>
+            <a:ext cx="3108960" cy="384048"/>
           </a:xfrm>
           <a:prstGeom prst="roundRect">
             <a:avLst/>
@@ -8588,11 +8452,11 @@
           </a:fontRef>
         </p:style>
         <p:txBody>
-          <a:bodyPr rtlCol="0" anchor="ctr" wrap="none" lIns="109728" rIns="109728" tIns="36576" bIns="36576"/>
+          <a:bodyPr rtlCol="0" anchor="ctr" wrap="none" lIns="128016" rIns="128016" tIns="36576" bIns="36576"/>
           <a:lstStyle/>
           <a:p>
             <a:pPr algn="ctr">
-              <a:defRPr sz="950" b="1">
+              <a:defRPr sz="1100" b="1">
                 <a:solidFill>
                   <a:srgbClr val="FFFFFF"/>
                 </a:solidFill>
@@ -8613,8 +8477,8 @@
         </p:nvSpPr>
         <p:spPr>
           <a:xfrm>
-            <a:off x="5029200" y="1234440"/>
-            <a:ext cx="6400800" cy="1280160"/>
+            <a:off x="5212080" y="1051560"/>
+            <a:ext cx="6217920" cy="914400"/>
           </a:xfrm>
           <a:prstGeom prst="rect">
             <a:avLst/>
@@ -8628,7 +8492,7 @@
           <a:lstStyle/>
           <a:p>
             <a:pPr>
-              <a:defRPr sz="3600" b="1">
+              <a:defRPr sz="3200" b="1">
                 <a:solidFill>
                   <a:srgbClr val="241C1C"/>
                 </a:solidFill>
@@ -8636,11 +8500,7 @@
               </a:defRPr>
             </a:pPr>
             <a:r>
-              <a:t>THE DUAL BOTTLENECK IN</a:t>
-            </a:r>
-            <a:br/>
-            <a:r>
-              <a:t>URBAN LAST-MILE LOGISTICS</a:t>
+              <a:t>THE DUAL BOTTLENECK IN URBAN LOGISTICS</a:t>
             </a:r>
           </a:p>
         </p:txBody>
@@ -8653,8 +8513,8 @@
         </p:nvSpPr>
         <p:spPr>
           <a:xfrm>
-            <a:off x="5029200" y="2651760"/>
-            <a:ext cx="6400800" cy="3657600"/>
+            <a:off x="5212080" y="2011680"/>
+            <a:ext cx="6217920" cy="4206240"/>
           </a:xfrm>
           <a:prstGeom prst="rect">
             <a:avLst/>
@@ -8668,7 +8528,21 @@
           <a:lstStyle/>
           <a:p>
             <a:pPr>
-              <a:defRPr sz="1200" b="1">
+              <a:defRPr sz="1400" b="1">
+                <a:solidFill>
+                  <a:srgbClr val="E85923"/>
+                </a:solidFill>
+                <a:latin typeface="Inter"/>
+              </a:defRPr>
+            </a:pPr>
+            <a:r>
+              <a:t>TWO MATHEMATICAL HURDLES IN SCALABLE DISPATCHING:</a:t>
+            </a:r>
+          </a:p>
+          <a:p>
+            <a:br/>
+            <a:pPr>
+              <a:defRPr sz="1300" b="1">
                 <a:solidFill>
                   <a:srgbClr val="241C1C"/>
                 </a:solidFill>
@@ -8676,25 +8550,26 @@
               </a:defRPr>
             </a:pPr>
             <a:r>
-              <a:t>LAST-MILE COURIERS FACE TWO INTERCONNECTED COMPUTATIONAL BOTTLENECKS THAT CANNOT BE SOLVED BY INTUITION:</a:t>
-            </a:r>
-          </a:p>
-          <a:p>
-            <a:pPr>
-              <a:defRPr sz="1100" b="1">
-                <a:solidFill>
-                  <a:srgbClr val="E85923"/>
-                </a:solidFill>
-                <a:latin typeface="Inter"/>
-              </a:defRPr>
-            </a:pPr>
-            <a:r>
-              <a:t>1. The Order Selection Bottleneck (Knapsack Dilemma):</a:t>
-            </a:r>
-          </a:p>
-          <a:p>
-            <a:pPr>
-              <a:defRPr sz="1000">
+              <a:t>1. Combinatorial Cargo Explosion:</a:t>
+            </a:r>
+          </a:p>
+          <a:p>
+            <a:pPr>
+              <a:defRPr sz="1200">
+                <a:solidFill>
+                  <a:srgbClr val="645A55"/>
+                </a:solidFill>
+                <a:latin typeface="Inter"/>
+              </a:defRPr>
+            </a:pPr>
+            <a:r>
+              <a:t>With 35+ customer orders and strict vehicle weight limits (e.g. 100 kg), evaluating all 2^35 (34.3 billion) order subsets is impossible. Naive heuristics cause payload voids and lost revenue.</a:t>
+            </a:r>
+          </a:p>
+          <a:p>
+            <a:br/>
+            <a:pPr>
+              <a:defRPr sz="1300" b="1">
                 <a:solidFill>
                   <a:srgbClr val="241C1C"/>
                 </a:solidFill>
@@ -8702,25 +8577,26 @@
               </a:defRPr>
             </a:pPr>
             <a:r>
-              <a:t>With 35+ pending parcel requests across Hyderabad and limited vehicle cargo capacity (e.g. 100 kg), testing all 2^35 (34.3 billion) parcel combinations by brute force is computationally infeasible. Naive greedy sorting frequently leaves empty vehicle payload voids, resulting in severe revenue loss.</a:t>
-            </a:r>
-          </a:p>
-          <a:p>
-            <a:pPr>
-              <a:defRPr sz="1100" b="1">
-                <a:solidFill>
-                  <a:srgbClr val="E85923"/>
-                </a:solidFill>
-                <a:latin typeface="Inter"/>
-              </a:defRPr>
-            </a:pPr>
-            <a:r>
-              <a:t>2. The Network Routing Bottleneck (Spatial Path Dilemma):</a:t>
-            </a:r>
-          </a:p>
-          <a:p>
-            <a:pPr>
-              <a:defRPr sz="1000">
+              <a:t>2. Spatial Route Inefficiencies:</a:t>
+            </a:r>
+          </a:p>
+          <a:p>
+            <a:pPr>
+              <a:defRPr sz="1200">
+                <a:solidFill>
+                  <a:srgbClr val="645A55"/>
+                </a:solidFill>
+                <a:latin typeface="Inter"/>
+              </a:defRPr>
+            </a:pPr>
+            <a:r>
+              <a:t>Hyderabad's congested road network demands optimal waypoint sequencing. Suboptimal routing causes 69+ km excess transit and severe fuel waste.</a:t>
+            </a:r>
+          </a:p>
+          <a:p>
+            <a:br/>
+            <a:pPr>
+              <a:defRPr sz="1300" b="1">
                 <a:solidFill>
                   <a:srgbClr val="241C1C"/>
                 </a:solidFill>
@@ -8728,33 +8604,20 @@
               </a:defRPr>
             </a:pPr>
             <a:r>
-              <a:t>Once orders are chosen, dispatchers must find the optimal transit path from the Begumpet Central Hub through dense traffic corridors (HITEC City, Gachibowli, Secunderabad, Woxsen University). Suboptimal delivery sequences cause exponential fuel waste and SLA penalties.</a:t>
-            </a:r>
-          </a:p>
-          <a:p>
-            <a:pPr>
-              <a:defRPr sz="1100" b="1">
-                <a:solidFill>
-                  <a:srgbClr val="E85923"/>
-                </a:solidFill>
-                <a:latin typeface="Inter"/>
-              </a:defRPr>
-            </a:pPr>
-            <a:r>
-              <a:t>3. The Real-Time Constraint:</a:t>
-            </a:r>
-          </a:p>
-          <a:p>
-            <a:pPr>
-              <a:defRPr sz="1000">
-                <a:solidFill>
-                  <a:srgbClr val="241C1C"/>
-                </a:solidFill>
-                <a:latin typeface="Inter"/>
-              </a:defRPr>
-            </a:pPr>
-            <a:r>
-              <a:t>The system must execute both selection and routing algorithms in under 50 milliseconds to support dynamic driver dispatch and continuous delivery requests.</a:t>
+              <a:t>3. Real-Time Operational Latency:</a:t>
+            </a:r>
+          </a:p>
+          <a:p>
+            <a:pPr>
+              <a:defRPr sz="1200">
+                <a:solidFill>
+                  <a:srgbClr val="645A55"/>
+                </a:solidFill>
+                <a:latin typeface="Inter"/>
+              </a:defRPr>
+            </a:pPr>
+            <a:r>
+              <a:t>Algorithms must run in sub-50 milliseconds to handle continuous live dispatch requests.</a:t>
             </a:r>
           </a:p>
         </p:txBody>
@@ -8794,7 +8657,7 @@
         <p:spPr>
           <a:xfrm>
             <a:off x="731520" y="548640"/>
-            <a:ext cx="2926080" cy="347472"/>
+            <a:ext cx="3108960" cy="384048"/>
           </a:xfrm>
           <a:prstGeom prst="roundRect">
             <a:avLst/>
@@ -8821,11 +8684,11 @@
           </a:fontRef>
         </p:style>
         <p:txBody>
-          <a:bodyPr rtlCol="0" anchor="ctr" wrap="none" lIns="109728" rIns="109728" tIns="36576" bIns="36576"/>
+          <a:bodyPr rtlCol="0" anchor="ctr" wrap="none" lIns="128016" rIns="128016" tIns="36576" bIns="36576"/>
           <a:lstStyle/>
           <a:p>
             <a:pPr algn="ctr">
-              <a:defRPr sz="950" b="1">
+              <a:defRPr sz="1100" b="1">
                 <a:solidFill>
                   <a:srgbClr val="FFFFFF"/>
                 </a:solidFill>
@@ -8861,7 +8724,7 @@
           <a:lstStyle/>
           <a:p>
             <a:pPr>
-              <a:defRPr sz="3200" b="1">
+              <a:defRPr sz="3400" b="1">
                 <a:solidFill>
                   <a:srgbClr val="241C1C"/>
                 </a:solidFill>
@@ -8869,14 +8732,14 @@
               </a:defRPr>
             </a:pPr>
             <a:r>
-              <a:t>THE ALGORITHMIC TRADE-OFF TRILEMMA</a:t>
+              <a:t>ALGORITHMIC TRADE-OFF TRILEMMA</a:t>
             </a:r>
           </a:p>
         </p:txBody>
       </p:sp>
       <p:pic>
         <p:nvPicPr>
-          <p:cNvPr id="4" name="Picture 3" descr="gradient_square_1.png"/>
+          <p:cNvPr id="4" name="Picture 3" descr="diag_knapsack_pack.png"/>
           <p:cNvPicPr>
             <a:picLocks noChangeAspect="1"/>
           </p:cNvPicPr>
@@ -8891,7 +8754,7 @@
         <p:spPr>
           <a:xfrm>
             <a:off x="731520" y="1737360"/>
-            <a:ext cx="3328416" cy="2926080"/>
+            <a:ext cx="3328416" cy="3291840"/>
           </a:xfrm>
           <a:prstGeom prst="rect">
             <a:avLst/>
@@ -8906,97 +8769,8 @@
         </p:nvSpPr>
         <p:spPr>
           <a:xfrm>
-            <a:off x="731520" y="4800600"/>
-            <a:ext cx="3328416" cy="365760"/>
-          </a:xfrm>
-          <a:prstGeom prst="rect">
-            <a:avLst/>
-          </a:prstGeom>
-          <a:noFill/>
-        </p:spPr>
-        <p:txBody>
-          <a:bodyPr wrap="none">
-            <a:spAutoFit/>
-          </a:bodyPr>
-          <a:lstStyle/>
-          <a:p>
-            <a:pPr algn="ctr">
-              <a:defRPr sz="1700" b="1">
-                <a:solidFill>
-                  <a:srgbClr val="241C1C"/>
-                </a:solidFill>
-                <a:latin typeface="The Seasons"/>
-              </a:defRPr>
-            </a:pPr>
-            <a:r>
-              <a:t>CAPACITY PACKING</a:t>
-            </a:r>
-          </a:p>
-        </p:txBody>
-      </p:sp>
-      <p:sp>
-        <p:nvSpPr>
-          <p:cNvPr id="6" name="Rounded Rectangle 5"/>
-          <p:cNvSpPr/>
-          <p:nvPr/>
-        </p:nvSpPr>
-        <p:spPr>
-          <a:xfrm>
-            <a:off x="1051560" y="5212080"/>
-            <a:ext cx="2688336" cy="292608"/>
-          </a:xfrm>
-          <a:prstGeom prst="roundRect">
-            <a:avLst/>
-          </a:prstGeom>
-          <a:solidFill>
-            <a:srgbClr val="241C1C"/>
-          </a:solidFill>
-          <a:ln>
-            <a:noFill/>
-          </a:ln>
-        </p:spPr>
-        <p:style>
-          <a:lnRef idx="1">
-            <a:schemeClr val="accent1"/>
-          </a:lnRef>
-          <a:fillRef idx="3">
-            <a:schemeClr val="accent1"/>
-          </a:fillRef>
-          <a:effectRef idx="2">
-            <a:schemeClr val="accent1"/>
-          </a:effectRef>
-          <a:fontRef idx="minor">
-            <a:schemeClr val="lt1"/>
-          </a:fontRef>
-        </p:style>
-        <p:txBody>
-          <a:bodyPr rtlCol="0" anchor="ctr" wrap="none" lIns="109728" rIns="109728" tIns="36576" bIns="36576"/>
-          <a:lstStyle/>
-          <a:p>
-            <a:pPr algn="ctr">
-              <a:defRPr sz="850" b="1">
-                <a:solidFill>
-                  <a:srgbClr val="FFFFFF"/>
-                </a:solidFill>
-                <a:latin typeface="Inter"/>
-              </a:defRPr>
-            </a:pPr>
-            <a:r>
-              <a:t>0/1 KNAPSACK PROBLEM</a:t>
-            </a:r>
-          </a:p>
-        </p:txBody>
-      </p:sp>
-      <p:sp>
-        <p:nvSpPr>
-          <p:cNvPr id="7" name="TextBox 6"/>
-          <p:cNvSpPr txBox="1"/>
-          <p:nvPr/>
-        </p:nvSpPr>
-        <p:spPr>
-          <a:xfrm>
-            <a:off x="731520" y="5577840"/>
-            <a:ext cx="3328416" cy="1005840"/>
+            <a:off x="731520" y="5166360"/>
+            <a:ext cx="3328416" cy="1188720"/>
           </a:xfrm>
           <a:prstGeom prst="rect">
             <a:avLst/>
@@ -9009,23 +8783,36 @@
           </a:bodyPr>
           <a:lstStyle/>
           <a:p>
-            <a:pPr algn="ctr">
-              <a:defRPr sz="850">
-                <a:solidFill>
-                  <a:srgbClr val="736964"/>
-                </a:solidFill>
-                <a:latin typeface="Inter"/>
-              </a:defRPr>
-            </a:pPr>
-            <a:r>
-              <a:t>DISCRETE CHOICES CANNOT BE FRACTIONALIZED. GREEDY CHOICE PROPERTY FAILS TO GUARANTEE OPTIMALITY WHEN ITEM WEIGHTS CREATE PACKING VOIDS. REQUIRES 2D DP.</a:t>
+            <a:pPr>
+              <a:defRPr sz="1500" b="1">
+                <a:solidFill>
+                  <a:srgbClr val="241C1C"/>
+                </a:solidFill>
+                <a:latin typeface="Inter"/>
+              </a:defRPr>
+            </a:pPr>
+            <a:r>
+              <a:t>CAPACITY PACKING</a:t>
+            </a:r>
+          </a:p>
+          <a:p>
+            <a:pPr>
+              <a:defRPr sz="1100">
+                <a:solidFill>
+                  <a:srgbClr val="645A55"/>
+                </a:solidFill>
+                <a:latin typeface="Inter"/>
+              </a:defRPr>
+            </a:pPr>
+            <a:r>
+              <a:t>0/1 KNAPSACK PROBLEM  —  Discrete orders cannot be split. 0/1 Knapsack DP evaluates all subproblems to fill 100% of payload capacity.</a:t>
             </a:r>
           </a:p>
         </p:txBody>
       </p:sp>
       <p:pic>
         <p:nvPicPr>
-          <p:cNvPr id="8" name="Picture 7" descr="gradient_square_2.png"/>
+          <p:cNvPr id="6" name="Picture 5" descr="diag_greedy_trap.png"/>
           <p:cNvPicPr>
             <a:picLocks noChangeAspect="1"/>
           </p:cNvPicPr>
@@ -9040,7 +8827,7 @@
         <p:spPr>
           <a:xfrm>
             <a:off x="4425696" y="1737360"/>
-            <a:ext cx="3328416" cy="2926080"/>
+            <a:ext cx="3328416" cy="3291840"/>
           </a:xfrm>
           <a:prstGeom prst="rect">
             <a:avLst/>
@@ -9049,103 +8836,14 @@
       </p:pic>
       <p:sp>
         <p:nvSpPr>
-          <p:cNvPr id="9" name="TextBox 8"/>
+          <p:cNvPr id="7" name="TextBox 6"/>
           <p:cNvSpPr txBox="1"/>
           <p:nvPr/>
         </p:nvSpPr>
         <p:spPr>
           <a:xfrm>
-            <a:off x="4425696" y="4800600"/>
-            <a:ext cx="3328416" cy="365760"/>
-          </a:xfrm>
-          <a:prstGeom prst="rect">
-            <a:avLst/>
-          </a:prstGeom>
-          <a:noFill/>
-        </p:spPr>
-        <p:txBody>
-          <a:bodyPr wrap="none">
-            <a:spAutoFit/>
-          </a:bodyPr>
-          <a:lstStyle/>
-          <a:p>
-            <a:pPr algn="ctr">
-              <a:defRPr sz="1700" b="1">
-                <a:solidFill>
-                  <a:srgbClr val="241C1C"/>
-                </a:solidFill>
-                <a:latin typeface="The Seasons"/>
-              </a:defRPr>
-            </a:pPr>
-            <a:r>
-              <a:t>DISPATCH HEURISTICS</a:t>
-            </a:r>
-          </a:p>
-        </p:txBody>
-      </p:sp>
-      <p:sp>
-        <p:nvSpPr>
-          <p:cNvPr id="10" name="Rounded Rectangle 9"/>
-          <p:cNvSpPr/>
-          <p:nvPr/>
-        </p:nvSpPr>
-        <p:spPr>
-          <a:xfrm>
-            <a:off x="4745736" y="5212080"/>
-            <a:ext cx="2688336" cy="292608"/>
-          </a:xfrm>
-          <a:prstGeom prst="roundRect">
-            <a:avLst/>
-          </a:prstGeom>
-          <a:solidFill>
-            <a:srgbClr val="241C1C"/>
-          </a:solidFill>
-          <a:ln>
-            <a:noFill/>
-          </a:ln>
-        </p:spPr>
-        <p:style>
-          <a:lnRef idx="1">
-            <a:schemeClr val="accent1"/>
-          </a:lnRef>
-          <a:fillRef idx="3">
-            <a:schemeClr val="accent1"/>
-          </a:fillRef>
-          <a:effectRef idx="2">
-            <a:schemeClr val="accent1"/>
-          </a:effectRef>
-          <a:fontRef idx="minor">
-            <a:schemeClr val="lt1"/>
-          </a:fontRef>
-        </p:style>
-        <p:txBody>
-          <a:bodyPr rtlCol="0" anchor="ctr" wrap="none" lIns="109728" rIns="109728" tIns="36576" bIns="36576"/>
-          <a:lstStyle/>
-          <a:p>
-            <a:pPr algn="ctr">
-              <a:defRPr sz="850" b="1">
-                <a:solidFill>
-                  <a:srgbClr val="FFFFFF"/>
-                </a:solidFill>
-                <a:latin typeface="Inter"/>
-              </a:defRPr>
-            </a:pPr>
-            <a:r>
-              <a:t>GREEDY APPROXIMATION TRAPS</a:t>
-            </a:r>
-          </a:p>
-        </p:txBody>
-      </p:sp>
-      <p:sp>
-        <p:nvSpPr>
-          <p:cNvPr id="11" name="TextBox 10"/>
-          <p:cNvSpPr txBox="1"/>
-          <p:nvPr/>
-        </p:nvSpPr>
-        <p:spPr>
-          <a:xfrm>
-            <a:off x="4425696" y="5577840"/>
-            <a:ext cx="3328416" cy="1005840"/>
+            <a:off x="4425696" y="5166360"/>
+            <a:ext cx="3328416" cy="1188720"/>
           </a:xfrm>
           <a:prstGeom prst="rect">
             <a:avLst/>
@@ -9158,23 +8856,36 @@
           </a:bodyPr>
           <a:lstStyle/>
           <a:p>
-            <a:pPr algn="ctr">
-              <a:defRPr sz="850">
-                <a:solidFill>
-                  <a:srgbClr val="736964"/>
-                </a:solidFill>
-                <a:latin typeface="Inter"/>
-              </a:defRPr>
-            </a:pPr>
-            <a:r>
-              <a:t>SORTING BY PROFIT DENSITY (₹/KG) RUNS FAST IN O(N LOG N), BUT FREQUENTLY COMMITS TO SUBOPTIMAL HIGH-RATIO LIGHTWEIGHT ITEMS THAT SQUANDER TOTAL VALUE.</a:t>
+            <a:pPr>
+              <a:defRPr sz="1500" b="1">
+                <a:solidFill>
+                  <a:srgbClr val="241C1C"/>
+                </a:solidFill>
+                <a:latin typeface="Inter"/>
+              </a:defRPr>
+            </a:pPr>
+            <a:r>
+              <a:t>HEURISTIC TRAP</a:t>
+            </a:r>
+          </a:p>
+          <a:p>
+            <a:pPr>
+              <a:defRPr sz="1100">
+                <a:solidFill>
+                  <a:srgbClr val="645A55"/>
+                </a:solidFill>
+                <a:latin typeface="Inter"/>
+              </a:defRPr>
+            </a:pPr>
+            <a:r>
+              <a:t>GREEDY APPROXIMATION  —  Greedy ratio sorting commits to small items first, leaving capacity voids and losing up to Rs. 2,650 in revenue.</a:t>
             </a:r>
           </a:p>
         </p:txBody>
       </p:sp>
       <p:pic>
         <p:nvPicPr>
-          <p:cNvPr id="12" name="Picture 11" descr="gradient_square_3.png"/>
+          <p:cNvPr id="8" name="Picture 7" descr="diag_routing_dilemma.png"/>
           <p:cNvPicPr>
             <a:picLocks noChangeAspect="1"/>
           </p:cNvPicPr>
@@ -9189,7 +8900,7 @@
         <p:spPr>
           <a:xfrm>
             <a:off x="8119872" y="1737360"/>
-            <a:ext cx="3328416" cy="2926080"/>
+            <a:ext cx="3328416" cy="3291840"/>
           </a:xfrm>
           <a:prstGeom prst="rect">
             <a:avLst/>
@@ -9198,103 +8909,14 @@
       </p:pic>
       <p:sp>
         <p:nvSpPr>
-          <p:cNvPr id="13" name="TextBox 12"/>
+          <p:cNvPr id="9" name="TextBox 8"/>
           <p:cNvSpPr txBox="1"/>
           <p:nvPr/>
         </p:nvSpPr>
         <p:spPr>
           <a:xfrm>
-            <a:off x="8119872" y="4800600"/>
-            <a:ext cx="3328416" cy="365760"/>
-          </a:xfrm>
-          <a:prstGeom prst="rect">
-            <a:avLst/>
-          </a:prstGeom>
-          <a:noFill/>
-        </p:spPr>
-        <p:txBody>
-          <a:bodyPr wrap="none">
-            <a:spAutoFit/>
-          </a:bodyPr>
-          <a:lstStyle/>
-          <a:p>
-            <a:pPr algn="ctr">
-              <a:defRPr sz="1700" b="1">
-                <a:solidFill>
-                  <a:srgbClr val="241C1C"/>
-                </a:solidFill>
-                <a:latin typeface="The Seasons"/>
-              </a:defRPr>
-            </a:pPr>
-            <a:r>
-              <a:t>SPATIAL ROUTING</a:t>
-            </a:r>
-          </a:p>
-        </p:txBody>
-      </p:sp>
-      <p:sp>
-        <p:nvSpPr>
-          <p:cNvPr id="14" name="Rounded Rectangle 13"/>
-          <p:cNvSpPr/>
-          <p:nvPr/>
-        </p:nvSpPr>
-        <p:spPr>
-          <a:xfrm>
-            <a:off x="8439912" y="5212080"/>
-            <a:ext cx="2688336" cy="292608"/>
-          </a:xfrm>
-          <a:prstGeom prst="roundRect">
-            <a:avLst/>
-          </a:prstGeom>
-          <a:solidFill>
-            <a:srgbClr val="241C1C"/>
-          </a:solidFill>
-          <a:ln>
-            <a:noFill/>
-          </a:ln>
-        </p:spPr>
-        <p:style>
-          <a:lnRef idx="1">
-            <a:schemeClr val="accent1"/>
-          </a:lnRef>
-          <a:fillRef idx="3">
-            <a:schemeClr val="accent1"/>
-          </a:fillRef>
-          <a:effectRef idx="2">
-            <a:schemeClr val="accent1"/>
-          </a:effectRef>
-          <a:fontRef idx="minor">
-            <a:schemeClr val="lt1"/>
-          </a:fontRef>
-        </p:style>
-        <p:txBody>
-          <a:bodyPr rtlCol="0" anchor="ctr" wrap="none" lIns="109728" rIns="109728" tIns="36576" bIns="36576"/>
-          <a:lstStyle/>
-          <a:p>
-            <a:pPr algn="ctr">
-              <a:defRPr sz="850" b="1">
-                <a:solidFill>
-                  <a:srgbClr val="FFFFFF"/>
-                </a:solidFill>
-                <a:latin typeface="Inter"/>
-              </a:defRPr>
-            </a:pPr>
-            <a:r>
-              <a:t>DIJKSTRA VS BELLMAN-FORD</a:t>
-            </a:r>
-          </a:p>
-        </p:txBody>
-      </p:sp>
-      <p:sp>
-        <p:nvSpPr>
-          <p:cNvPr id="15" name="TextBox 14"/>
-          <p:cNvSpPr txBox="1"/>
-          <p:nvPr/>
-        </p:nvSpPr>
-        <p:spPr>
-          <a:xfrm>
-            <a:off x="8119872" y="5577840"/>
-            <a:ext cx="3328416" cy="1005840"/>
+            <a:off x="8119872" y="5166360"/>
+            <a:ext cx="3328416" cy="1188720"/>
           </a:xfrm>
           <a:prstGeom prst="rect">
             <a:avLst/>
@@ -9307,16 +8929,29 @@
           </a:bodyPr>
           <a:lstStyle/>
           <a:p>
-            <a:pPr algn="ctr">
-              <a:defRPr sz="850">
-                <a:solidFill>
-                  <a:srgbClr val="736964"/>
-                </a:solidFill>
-                <a:latin typeface="Inter"/>
-              </a:defRPr>
-            </a:pPr>
-            <a:r>
-              <a:t>DIJKSTRA GREEDY MIN-HEAP FINDS FAST SHORTEST PATHS BUT FAILS ON DYNAMIC PENALTY ARBITRAGE AND CONGESTION REBATES. BELLMAN-FORD ENSURES DP CONVERGENCE.</a:t>
+            <a:pPr>
+              <a:defRPr sz="1500" b="1">
+                <a:solidFill>
+                  <a:srgbClr val="241C1C"/>
+                </a:solidFill>
+                <a:latin typeface="Inter"/>
+              </a:defRPr>
+            </a:pPr>
+            <a:r>
+              <a:t>SPATIAL ROUTING</a:t>
+            </a:r>
+          </a:p>
+          <a:p>
+            <a:pPr>
+              <a:defRPr sz="1100">
+                <a:solidFill>
+                  <a:srgbClr val="645A55"/>
+                </a:solidFill>
+                <a:latin typeface="Inter"/>
+              </a:defRPr>
+            </a:pPr>
+            <a:r>
+              <a:t>DIJKSTRA VS BELLMAN-FORD  —  Dijkstra provides ultra-fast O((V+E)logV) navigation; Bellman-Ford audits negative congestion cycles.</a:t>
             </a:r>
           </a:p>
         </p:txBody>
@@ -9356,7 +8991,7 @@
         <p:spPr>
           <a:xfrm>
             <a:off x="731520" y="548640"/>
-            <a:ext cx="2926080" cy="347472"/>
+            <a:ext cx="2926080" cy="384048"/>
           </a:xfrm>
           <a:prstGeom prst="roundRect">
             <a:avLst/>
@@ -9383,11 +9018,11 @@
           </a:fontRef>
         </p:style>
         <p:txBody>
-          <a:bodyPr rtlCol="0" anchor="ctr" wrap="none" lIns="109728" rIns="109728" tIns="36576" bIns="36576"/>
+          <a:bodyPr rtlCol="0" anchor="ctr" wrap="none" lIns="128016" rIns="128016" tIns="36576" bIns="36576"/>
           <a:lstStyle/>
           <a:p>
             <a:pPr algn="ctr">
-              <a:defRPr sz="950" b="1">
+              <a:defRPr sz="1100" b="1">
                 <a:solidFill>
                   <a:srgbClr val="FFFFFF"/>
                 </a:solidFill>
@@ -9423,7 +9058,7 @@
           <a:lstStyle/>
           <a:p>
             <a:pPr>
-              <a:defRPr sz="3200" b="1">
+              <a:defRPr sz="3400" b="1">
                 <a:solidFill>
                   <a:srgbClr val="241C1C"/>
                 </a:solidFill>
@@ -9438,7 +9073,7 @@
       </p:sp>
       <p:pic>
         <p:nvPicPr>
-          <p:cNvPr id="4" name="Picture 3" descr="gradient_square_1.png"/>
+          <p:cNvPr id="4" name="Picture 3" descr="literature_timeline_visual.png"/>
           <p:cNvPicPr>
             <a:picLocks noChangeAspect="1"/>
           </p:cNvPicPr>
@@ -9452,8 +9087,8 @@
         </p:blipFill>
         <p:spPr>
           <a:xfrm>
-            <a:off x="731520" y="1737360"/>
-            <a:ext cx="3328416" cy="2926080"/>
+            <a:off x="731520" y="1691640"/>
+            <a:ext cx="10728655" cy="3200400"/>
           </a:xfrm>
           <a:prstGeom prst="rect">
             <a:avLst/>
@@ -9462,59 +9097,25 @@
       </p:pic>
       <p:sp>
         <p:nvSpPr>
-          <p:cNvPr id="5" name="TextBox 4"/>
-          <p:cNvSpPr txBox="1"/>
-          <p:nvPr/>
-        </p:nvSpPr>
-        <p:spPr>
-          <a:xfrm>
-            <a:off x="731520" y="4800600"/>
-            <a:ext cx="3328416" cy="365760"/>
-          </a:xfrm>
-          <a:prstGeom prst="rect">
-            <a:avLst/>
-          </a:prstGeom>
-          <a:noFill/>
-        </p:spPr>
-        <p:txBody>
-          <a:bodyPr wrap="none">
-            <a:spAutoFit/>
-          </a:bodyPr>
-          <a:lstStyle/>
-          <a:p>
-            <a:pPr algn="ctr">
-              <a:defRPr sz="1600" b="1">
-                <a:solidFill>
-                  <a:srgbClr val="241C1C"/>
-                </a:solidFill>
-                <a:latin typeface="The Seasons"/>
-              </a:defRPr>
-            </a:pPr>
-            <a:r>
-              <a:t>DYNAMIC PROGRAMMING</a:t>
-            </a:r>
-          </a:p>
-        </p:txBody>
-      </p:sp>
-      <p:sp>
-        <p:nvSpPr>
-          <p:cNvPr id="6" name="Rounded Rectangle 5"/>
+          <p:cNvPr id="5" name="Rounded Rectangle 4"/>
           <p:cNvSpPr/>
           <p:nvPr/>
         </p:nvSpPr>
         <p:spPr>
           <a:xfrm>
-            <a:off x="822960" y="5212080"/>
-            <a:ext cx="3145536" cy="292608"/>
+            <a:off x="731520" y="5074920"/>
+            <a:ext cx="5120640" cy="1280160"/>
           </a:xfrm>
           <a:prstGeom prst="roundRect">
             <a:avLst/>
           </a:prstGeom>
           <a:solidFill>
-            <a:srgbClr val="241C1C"/>
+            <a:srgbClr val="FFFFFF"/>
           </a:solidFill>
           <a:ln>
-            <a:noFill/>
+            <a:solidFill>
+              <a:srgbClr val="D7D0C6"/>
+            </a:solidFill>
           </a:ln>
         </p:spPr>
         <p:style>
@@ -9532,138 +9133,57 @@
           </a:fontRef>
         </p:style>
         <p:txBody>
-          <a:bodyPr rtlCol="0" anchor="ctr" wrap="none" lIns="109728" rIns="109728" tIns="36576" bIns="36576"/>
+          <a:bodyPr rtlCol="0" anchor="ctr" wrap="square" lIns="137160" tIns="137160"/>
           <a:lstStyle/>
           <a:p>
             <a:pPr algn="ctr">
-              <a:defRPr sz="800" b="1">
-                <a:solidFill>
-                  <a:srgbClr val="FFFFFF"/>
-                </a:solidFill>
-                <a:latin typeface="Inter"/>
-              </a:defRPr>
-            </a:pPr>
-            <a:r>
-              <a:t>BELLMAN (1957) • MARTELLO &amp; TOTH (1990)</a:t>
-            </a:r>
-          </a:p>
-        </p:txBody>
-      </p:sp>
-      <p:sp>
-        <p:nvSpPr>
-          <p:cNvPr id="7" name="TextBox 6"/>
-          <p:cNvSpPr txBox="1"/>
-          <p:nvPr/>
-        </p:nvSpPr>
-        <p:spPr>
-          <a:xfrm>
-            <a:off x="731520" y="5577840"/>
-            <a:ext cx="3328416" cy="1005840"/>
-          </a:xfrm>
-          <a:prstGeom prst="rect">
-            <a:avLst/>
-          </a:prstGeom>
-          <a:noFill/>
-        </p:spPr>
-        <p:txBody>
-          <a:bodyPr wrap="square">
-            <a:spAutoFit/>
-          </a:bodyPr>
-          <a:lstStyle/>
-          <a:p>
-            <a:pPr algn="ctr">
-              <a:defRPr sz="850">
-                <a:solidFill>
-                  <a:srgbClr val="736964"/>
-                </a:solidFill>
-                <a:latin typeface="Inter"/>
-              </a:defRPr>
-            </a:pPr>
-            <a:r>
-              <a:t>BELLMAN ESTABLISHED THE PRINCIPLE OF OPTIMALITY: GLOBAL OPTIMAL DECISIONS DEPEND UPON OPTIMAL SUBPROBLEMS. MARTELLO &amp; TOTH CODIFIED THE 0/1 KNAPSACK 2D MEMOIZATION RECURRENCE IN O(N · W).</a:t>
-            </a:r>
-          </a:p>
-        </p:txBody>
-      </p:sp>
-      <p:pic>
-        <p:nvPicPr>
-          <p:cNvPr id="8" name="Picture 7" descr="gradient_square_2.png"/>
-          <p:cNvPicPr>
-            <a:picLocks noChangeAspect="1"/>
-          </p:cNvPicPr>
-          <p:nvPr/>
-        </p:nvPicPr>
-        <p:blipFill>
-          <a:blip r:embed="rId3"/>
-          <a:stretch>
-            <a:fillRect/>
-          </a:stretch>
-        </p:blipFill>
-        <p:spPr>
-          <a:xfrm>
-            <a:off x="4425696" y="1737360"/>
-            <a:ext cx="3328416" cy="2926080"/>
-          </a:xfrm>
-          <a:prstGeom prst="rect">
-            <a:avLst/>
-          </a:prstGeom>
-        </p:spPr>
-      </p:pic>
-      <p:sp>
-        <p:nvSpPr>
-          <p:cNvPr id="9" name="TextBox 8"/>
-          <p:cNvSpPr txBox="1"/>
-          <p:nvPr/>
-        </p:nvSpPr>
-        <p:spPr>
-          <a:xfrm>
-            <a:off x="4425696" y="4800600"/>
-            <a:ext cx="3328416" cy="365760"/>
-          </a:xfrm>
-          <a:prstGeom prst="rect">
-            <a:avLst/>
-          </a:prstGeom>
-          <a:noFill/>
-        </p:spPr>
-        <p:txBody>
-          <a:bodyPr wrap="none">
-            <a:spAutoFit/>
-          </a:bodyPr>
-          <a:lstStyle/>
-          <a:p>
-            <a:pPr algn="ctr">
-              <a:defRPr sz="1600" b="1">
+              <a:defRPr sz="1300" b="1">
+                <a:solidFill>
+                  <a:srgbClr val="E85923"/>
+                </a:solidFill>
+                <a:latin typeface="Inter"/>
+              </a:defRPr>
+            </a:pPr>
+            <a:r>
+              <a:t>Key Finding 1: Dynamic Programming Optimality</a:t>
+            </a:r>
+          </a:p>
+          <a:p>
+            <a:pPr>
+              <a:defRPr sz="1100">
                 <a:solidFill>
                   <a:srgbClr val="241C1C"/>
                 </a:solidFill>
-                <a:latin typeface="The Seasons"/>
-              </a:defRPr>
-            </a:pPr>
-            <a:r>
-              <a:t>GREEDY HEURISTICS</a:t>
-            </a:r>
-          </a:p>
-        </p:txBody>
-      </p:sp>
-      <p:sp>
-        <p:nvSpPr>
-          <p:cNvPr id="10" name="Rounded Rectangle 9"/>
+                <a:latin typeface="Inter"/>
+              </a:defRPr>
+            </a:pPr>
+            <a:r>
+              <a:t>Bellman (1957) proved that optimal decisions decompose into subproblems. Martello &amp; Toth (1990) established the 2D memoization recurrence for discrete 0/1 knapsacks.</a:t>
+            </a:r>
+          </a:p>
+        </p:txBody>
+      </p:sp>
+      <p:sp>
+        <p:nvSpPr>
+          <p:cNvPr id="6" name="Rounded Rectangle 5"/>
           <p:cNvSpPr/>
           <p:nvPr/>
         </p:nvSpPr>
         <p:spPr>
           <a:xfrm>
-            <a:off x="4517136" y="5212080"/>
-            <a:ext cx="3145536" cy="292608"/>
+            <a:off x="6217920" y="5074920"/>
+            <a:ext cx="5120640" cy="1280160"/>
           </a:xfrm>
           <a:prstGeom prst="roundRect">
             <a:avLst/>
           </a:prstGeom>
           <a:solidFill>
-            <a:srgbClr val="241C1C"/>
+            <a:srgbClr val="FFFFFF"/>
           </a:solidFill>
           <a:ln>
-            <a:noFill/>
+            <a:solidFill>
+              <a:srgbClr val="D7D0C6"/>
+            </a:solidFill>
           </a:ln>
         </p:spPr>
         <p:style>
@@ -9681,204 +9201,32 @@
           </a:fontRef>
         </p:style>
         <p:txBody>
-          <a:bodyPr rtlCol="0" anchor="ctr" wrap="none" lIns="109728" rIns="109728" tIns="36576" bIns="36576"/>
+          <a:bodyPr rtlCol="0" anchor="ctr" wrap="square" lIns="137160" tIns="137160"/>
           <a:lstStyle/>
           <a:p>
             <a:pPr algn="ctr">
-              <a:defRPr sz="800" b="1">
-                <a:solidFill>
-                  <a:srgbClr val="FFFFFF"/>
-                </a:solidFill>
-                <a:latin typeface="Inter"/>
-              </a:defRPr>
-            </a:pPr>
-            <a:r>
-              <a:t>DANTZIG (1957) • CHVÁTAL (1979)</a:t>
-            </a:r>
-          </a:p>
-        </p:txBody>
-      </p:sp>
-      <p:sp>
-        <p:nvSpPr>
-          <p:cNvPr id="11" name="TextBox 10"/>
-          <p:cNvSpPr txBox="1"/>
-          <p:nvPr/>
-        </p:nvSpPr>
-        <p:spPr>
-          <a:xfrm>
-            <a:off x="4425696" y="5577840"/>
-            <a:ext cx="3328416" cy="1005840"/>
-          </a:xfrm>
-          <a:prstGeom prst="rect">
-            <a:avLst/>
-          </a:prstGeom>
-          <a:noFill/>
-        </p:spPr>
-        <p:txBody>
-          <a:bodyPr wrap="square">
-            <a:spAutoFit/>
-          </a:bodyPr>
-          <a:lstStyle/>
-          <a:p>
-            <a:pPr algn="ctr">
-              <a:defRPr sz="850">
-                <a:solidFill>
-                  <a:srgbClr val="736964"/>
-                </a:solidFill>
-                <a:latin typeface="Inter"/>
-              </a:defRPr>
-            </a:pPr>
-            <a:r>
-              <a:t>DANTZIG INTRODUCED THE PROFIT-TO-WEIGHT DENSITY RATIO FOR CONTINUOUS RELAXATIONS. CHVÁTAL PROVED GREEDY APPROXIMATION GAPS, CONFIRMING GREEDY IS SUBOPTIMAL FOR DISCRETE INTEGER CARGO.</a:t>
-            </a:r>
-          </a:p>
-        </p:txBody>
-      </p:sp>
-      <p:pic>
-        <p:nvPicPr>
-          <p:cNvPr id="12" name="Picture 11" descr="gradient_square_3.png"/>
-          <p:cNvPicPr>
-            <a:picLocks noChangeAspect="1"/>
-          </p:cNvPicPr>
-          <p:nvPr/>
-        </p:nvPicPr>
-        <p:blipFill>
-          <a:blip r:embed="rId4"/>
-          <a:stretch>
-            <a:fillRect/>
-          </a:stretch>
-        </p:blipFill>
-        <p:spPr>
-          <a:xfrm>
-            <a:off x="8119872" y="1737360"/>
-            <a:ext cx="3328416" cy="2926080"/>
-          </a:xfrm>
-          <a:prstGeom prst="rect">
-            <a:avLst/>
-          </a:prstGeom>
-        </p:spPr>
-      </p:pic>
-      <p:sp>
-        <p:nvSpPr>
-          <p:cNvPr id="13" name="TextBox 12"/>
-          <p:cNvSpPr txBox="1"/>
-          <p:nvPr/>
-        </p:nvSpPr>
-        <p:spPr>
-          <a:xfrm>
-            <a:off x="8119872" y="4800600"/>
-            <a:ext cx="3328416" cy="365760"/>
-          </a:xfrm>
-          <a:prstGeom prst="rect">
-            <a:avLst/>
-          </a:prstGeom>
-          <a:noFill/>
-        </p:spPr>
-        <p:txBody>
-          <a:bodyPr wrap="none">
-            <a:spAutoFit/>
-          </a:bodyPr>
-          <a:lstStyle/>
-          <a:p>
-            <a:pPr algn="ctr">
-              <a:defRPr sz="1600" b="1">
+              <a:defRPr sz="1300" b="1">
+                <a:solidFill>
+                  <a:srgbClr val="0096B4"/>
+                </a:solidFill>
+                <a:latin typeface="Inter"/>
+              </a:defRPr>
+            </a:pPr>
+            <a:r>
+              <a:t>Key Finding 2: Shortest-Path Graph Duality</a:t>
+            </a:r>
+          </a:p>
+          <a:p>
+            <a:pPr>
+              <a:defRPr sz="1100">
                 <a:solidFill>
                   <a:srgbClr val="241C1C"/>
                 </a:solidFill>
-                <a:latin typeface="The Seasons"/>
-              </a:defRPr>
-            </a:pPr>
-            <a:r>
-              <a:t>SHORTEST PATH NETWORKS</a:t>
-            </a:r>
-          </a:p>
-        </p:txBody>
-      </p:sp>
-      <p:sp>
-        <p:nvSpPr>
-          <p:cNvPr id="14" name="Rounded Rectangle 13"/>
-          <p:cNvSpPr/>
-          <p:nvPr/>
-        </p:nvSpPr>
-        <p:spPr>
-          <a:xfrm>
-            <a:off x="8211312" y="5212080"/>
-            <a:ext cx="3145536" cy="292608"/>
-          </a:xfrm>
-          <a:prstGeom prst="roundRect">
-            <a:avLst/>
-          </a:prstGeom>
-          <a:solidFill>
-            <a:srgbClr val="241C1C"/>
-          </a:solidFill>
-          <a:ln>
-            <a:noFill/>
-          </a:ln>
-        </p:spPr>
-        <p:style>
-          <a:lnRef idx="1">
-            <a:schemeClr val="accent1"/>
-          </a:lnRef>
-          <a:fillRef idx="3">
-            <a:schemeClr val="accent1"/>
-          </a:fillRef>
-          <a:effectRef idx="2">
-            <a:schemeClr val="accent1"/>
-          </a:effectRef>
-          <a:fontRef idx="minor">
-            <a:schemeClr val="lt1"/>
-          </a:fontRef>
-        </p:style>
-        <p:txBody>
-          <a:bodyPr rtlCol="0" anchor="ctr" wrap="none" lIns="109728" rIns="109728" tIns="36576" bIns="36576"/>
-          <a:lstStyle/>
-          <a:p>
-            <a:pPr algn="ctr">
-              <a:defRPr sz="800" b="1">
-                <a:solidFill>
-                  <a:srgbClr val="FFFFFF"/>
-                </a:solidFill>
-                <a:latin typeface="Inter"/>
-              </a:defRPr>
-            </a:pPr>
-            <a:r>
-              <a:t>DIJKSTRA (1959) • BELLMAN-FORD (1958)</a:t>
-            </a:r>
-          </a:p>
-        </p:txBody>
-      </p:sp>
-      <p:sp>
-        <p:nvSpPr>
-          <p:cNvPr id="15" name="TextBox 14"/>
-          <p:cNvSpPr txBox="1"/>
-          <p:nvPr/>
-        </p:nvSpPr>
-        <p:spPr>
-          <a:xfrm>
-            <a:off x="8119872" y="5577840"/>
-            <a:ext cx="3328416" cy="1005840"/>
-          </a:xfrm>
-          <a:prstGeom prst="rect">
-            <a:avLst/>
-          </a:prstGeom>
-          <a:noFill/>
-        </p:spPr>
-        <p:txBody>
-          <a:bodyPr wrap="square">
-            <a:spAutoFit/>
-          </a:bodyPr>
-          <a:lstStyle/>
-          <a:p>
-            <a:pPr algn="ctr">
-              <a:defRPr sz="850">
-                <a:solidFill>
-                  <a:srgbClr val="736964"/>
-                </a:solidFill>
-                <a:latin typeface="Inter"/>
-              </a:defRPr>
-            </a:pPr>
-            <a:r>
-              <a:t>DIJKSTRA PROVED GREEDY PRIORITY EXPANSIONS OPTIMAL IN NON-NEGATIVE ROAD NETWORKS O((V+E) LOG V). BELLMAN &amp; FORD FORMULATED ITERATIVE EDGE RELAXATIONS IN O(V · E) WITH CYCLE DETECTION.</a:t>
+                <a:latin typeface="Inter"/>
+              </a:defRPr>
+            </a:pPr>
+            <a:r>
+              <a:t>Dijkstra (1959) established greedy min-heap expansion for non-negative road graphs. Bellman-Ford (1958) generalized shortest paths via DP edge relaxations with cycle detection.</a:t>
             </a:r>
           </a:p>
         </p:txBody>
@@ -9918,7 +9266,7 @@
         <p:spPr>
           <a:xfrm>
             <a:off x="731520" y="548640"/>
-            <a:ext cx="2560320" cy="347472"/>
+            <a:ext cx="2743200" cy="384048"/>
           </a:xfrm>
           <a:prstGeom prst="roundRect">
             <a:avLst/>
@@ -9945,11 +9293,11 @@
           </a:fontRef>
         </p:style>
         <p:txBody>
-          <a:bodyPr rtlCol="0" anchor="ctr" wrap="none" lIns="109728" rIns="109728" tIns="36576" bIns="36576"/>
+          <a:bodyPr rtlCol="0" anchor="ctr" wrap="none" lIns="128016" rIns="128016" tIns="36576" bIns="36576"/>
           <a:lstStyle/>
           <a:p>
             <a:pPr algn="ctr">
-              <a:defRPr sz="950" b="1">
+              <a:defRPr sz="1100" b="1">
                 <a:solidFill>
                   <a:srgbClr val="FFFFFF"/>
                 </a:solidFill>
@@ -9985,7 +9333,7 @@
           <a:lstStyle/>
           <a:p>
             <a:pPr>
-              <a:defRPr sz="3200" b="1">
+              <a:defRPr sz="3400" b="1">
                 <a:solidFill>
                   <a:srgbClr val="241C1C"/>
                 </a:solidFill>
@@ -10007,7 +9355,7 @@
         <p:spPr>
           <a:xfrm>
             <a:off x="731520" y="1737360"/>
-            <a:ext cx="10728655" cy="731520"/>
+            <a:ext cx="10728655" cy="685800"/>
           </a:xfrm>
           <a:prstGeom prst="roundRect">
             <a:avLst/>
@@ -10038,7 +9386,7 @@
           <a:lstStyle/>
           <a:p>
             <a:pPr algn="ctr">
-              <a:defRPr sz="1100" b="1">
+              <a:defRPr sz="1200" b="1">
                 <a:solidFill>
                   <a:srgbClr val="FFFFFF"/>
                 </a:solidFill>
@@ -10059,8 +9407,8 @@
         </p:nvSpPr>
         <p:spPr>
           <a:xfrm>
-            <a:off x="731520" y="2743200"/>
-            <a:ext cx="3328416" cy="3474720"/>
+            <a:off x="731520" y="2651760"/>
+            <a:ext cx="3328416" cy="3657600"/>
           </a:xfrm>
           <a:prstGeom prst="roundRect">
             <a:avLst/>
@@ -10093,20 +9441,20 @@
           <a:lstStyle/>
           <a:p>
             <a:pPr algn="ctr">
-              <a:defRPr sz="1400" b="1">
+              <a:defRPr sz="1500" b="1">
                 <a:solidFill>
                   <a:srgbClr val="241C1C"/>
                 </a:solidFill>
-                <a:latin typeface="The Seasons"/>
-              </a:defRPr>
-            </a:pPr>
-            <a:r>
-              <a:t>STEP 1: DEMAND &amp; GRAPH MODEL</a:t>
-            </a:r>
-          </a:p>
-          <a:p>
-            <a:pPr>
-              <a:defRPr sz="900" b="1">
+                <a:latin typeface="Inter"/>
+              </a:defRPr>
+            </a:pPr>
+            <a:r>
+              <a:t>PHASE 1: DEMAND &amp; GRAPH</a:t>
+            </a:r>
+          </a:p>
+          <a:p>
+            <a:pPr>
+              <a:defRPr sz="1100" b="1">
                 <a:solidFill>
                   <a:srgbClr val="E85923"/>
                 </a:solidFill>
@@ -10118,8 +9466,9 @@
             </a:r>
           </a:p>
           <a:p>
-            <a:pPr>
-              <a:defRPr sz="1050">
+            <a:br/>
+            <a:pPr>
+              <a:defRPr sz="1200">
                 <a:solidFill>
                   <a:srgbClr val="241C1C"/>
                 </a:solidFill>
@@ -10131,15 +9480,15 @@
             </a:r>
             <a:br/>
             <a:r>
-              <a:t>• 35+ Delivery Request Nodes</a:t>
+              <a:t>• 35+ Delivery Request Nodes across Hyderabad</a:t>
             </a:r>
             <a:br/>
             <a:r>
-              <a:t>• Fleet Constraints: Van (100 kg), EV Bike (30 kg)</a:t>
+              <a:t>• Vehicle Payload Constraints: Van (100 kg), EV Bike (30 kg)</a:t>
             </a:r>
             <a:br/>
             <a:r>
-              <a:t>• Directed edge weights w(u,v) = road distance + traffic delays.</a:t>
+              <a:t>• Graph Matrix: Edge weights = road distance + traffic delay</a:t>
             </a:r>
           </a:p>
         </p:txBody>
@@ -10152,8 +9501,8 @@
         </p:nvSpPr>
         <p:spPr>
           <a:xfrm>
-            <a:off x="4425696" y="2743200"/>
-            <a:ext cx="3328416" cy="3474720"/>
+            <a:off x="4425696" y="2651760"/>
+            <a:ext cx="3328416" cy="3657600"/>
           </a:xfrm>
           <a:prstGeom prst="roundRect">
             <a:avLst/>
@@ -10186,20 +9535,20 @@
           <a:lstStyle/>
           <a:p>
             <a:pPr algn="ctr">
-              <a:defRPr sz="1400" b="1">
+              <a:defRPr sz="1500" b="1">
                 <a:solidFill>
                   <a:srgbClr val="241C1C"/>
                 </a:solidFill>
-                <a:latin typeface="The Seasons"/>
-              </a:defRPr>
-            </a:pPr>
-            <a:r>
-              <a:t>STEP 2: CARGO OPTIMIZATION</a:t>
-            </a:r>
-          </a:p>
-          <a:p>
-            <a:pPr>
-              <a:defRPr sz="900" b="1">
+                <a:latin typeface="Inter"/>
+              </a:defRPr>
+            </a:pPr>
+            <a:r>
+              <a:t>PHASE 2A: CARGO SELECTION</a:t>
+            </a:r>
+          </a:p>
+          <a:p>
+            <a:pPr>
+              <a:defRPr sz="1100" b="1">
                 <a:solidFill>
                   <a:srgbClr val="E85923"/>
                 </a:solidFill>
@@ -10211,8 +9560,9 @@
             </a:r>
           </a:p>
           <a:p>
-            <a:pPr>
-              <a:defRPr sz="1050">
+            <a:br/>
+            <a:pPr>
+              <a:defRPr sz="1200">
                 <a:solidFill>
                   <a:srgbClr val="241C1C"/>
                 </a:solidFill>
@@ -10220,19 +9570,19 @@
               </a:defRPr>
             </a:pPr>
             <a:r>
-              <a:t>• Run 0/1 Knapsack DP to compute optimal subset max profit.</a:t>
+              <a:t>• Run 0/1 Knapsack DP: Fills 100% capacity (Rs. 16,450)</a:t>
             </a:r>
             <a:br/>
             <a:r>
-              <a:t>• Run Profit Density Greedy (p/w) to compare heuristic speed.</a:t>
+              <a:t>• Run Profit Density Greedy (p/w): Fast sorting (Rs. 15,200)</a:t>
             </a:r>
             <a:br/>
             <a:r>
-              <a:t>• Run Earliest Deadline First (EDF) for SLA compliance.</a:t>
+              <a:t>• Run Earliest Deadline First (EDF) for urgent SLAs</a:t>
             </a:r>
             <a:br/>
             <a:r>
-              <a:t>• Measure profit loss and packing efficiency gaps.</a:t>
+              <a:t>• Evaluate revenue capture and packing efficiency gaps</a:t>
             </a:r>
           </a:p>
         </p:txBody>
@@ -10245,8 +9595,8 @@
         </p:nvSpPr>
         <p:spPr>
           <a:xfrm>
-            <a:off x="8119872" y="2743200"/>
-            <a:ext cx="3328416" cy="3474720"/>
+            <a:off x="8119872" y="2651760"/>
+            <a:ext cx="3328416" cy="3657600"/>
           </a:xfrm>
           <a:prstGeom prst="roundRect">
             <a:avLst/>
@@ -10279,20 +9629,20 @@
           <a:lstStyle/>
           <a:p>
             <a:pPr algn="ctr">
-              <a:defRPr sz="1400" b="1">
+              <a:defRPr sz="1500" b="1">
                 <a:solidFill>
                   <a:srgbClr val="241C1C"/>
                 </a:solidFill>
-                <a:latin typeface="The Seasons"/>
-              </a:defRPr>
-            </a:pPr>
-            <a:r>
-              <a:t>STEP 3: PATH SYNTHESIS</a:t>
-            </a:r>
-          </a:p>
-          <a:p>
-            <a:pPr>
-              <a:defRPr sz="900" b="1">
+                <a:latin typeface="Inter"/>
+              </a:defRPr>
+            </a:pPr>
+            <a:r>
+              <a:t>PHASE 2B: ROUTING SYNTHESIS</a:t>
+            </a:r>
+          </a:p>
+          <a:p>
+            <a:pPr>
+              <a:defRPr sz="1100" b="1">
                 <a:solidFill>
                   <a:srgbClr val="E85923"/>
                 </a:solidFill>
@@ -10304,8 +9654,9 @@
             </a:r>
           </a:p>
           <a:p>
-            <a:pPr>
-              <a:defRPr sz="1050">
+            <a:br/>
+            <a:pPr>
+              <a:defRPr sz="1200">
                 <a:solidFill>
                   <a:srgbClr val="241C1C"/>
                 </a:solidFill>
@@ -10313,19 +9664,19 @@
               </a:defRPr>
             </a:pPr>
             <a:r>
-              <a:t>• Dijkstra SSSP via custom Binary Min-Heap Priority Queue.</a:t>
+              <a:t>• Dijkstra SSSP via Binary Min-Heap Priority Queue</a:t>
             </a:r>
             <a:br/>
             <a:r>
-              <a:t>• Bellman-Ford checks for negative traffic congestion cycles.</a:t>
+              <a:t>• Bellman-Ford audits negative traffic congestion cycles</a:t>
             </a:r>
             <a:br/>
             <a:r>
-              <a:t>• Construct optimal turn-by-turn waypoint sequences.</a:t>
+              <a:t>• Construct optimal turn-by-turn waypoint sequences</a:t>
             </a:r>
             <a:br/>
             <a:r>
-              <a:t>• Output live dispatch metrics to Google Maps interface.</a:t>
+              <a:t>• Live dispatch telemetry streamed to Google Maps UI</a:t>
             </a:r>
           </a:p>
         </p:txBody>
@@ -10365,7 +9716,7 @@
         <p:spPr>
           <a:xfrm>
             <a:off x="731520" y="548640"/>
-            <a:ext cx="2560320" cy="347472"/>
+            <a:ext cx="2743200" cy="384048"/>
           </a:xfrm>
           <a:prstGeom prst="roundRect">
             <a:avLst/>
@@ -10392,11 +9743,11 @@
           </a:fontRef>
         </p:style>
         <p:txBody>
-          <a:bodyPr rtlCol="0" anchor="ctr" wrap="none" lIns="109728" rIns="109728" tIns="36576" bIns="36576"/>
+          <a:bodyPr rtlCol="0" anchor="ctr" wrap="none" lIns="128016" rIns="128016" tIns="36576" bIns="36576"/>
           <a:lstStyle/>
           <a:p>
             <a:pPr algn="ctr">
-              <a:defRPr sz="950" b="1">
+              <a:defRPr sz="1100" b="1">
                 <a:solidFill>
                   <a:srgbClr val="FFFFFF"/>
                 </a:solidFill>
@@ -10453,8 +9804,8 @@
         </p:nvSpPr>
         <p:spPr>
           <a:xfrm>
-            <a:off x="731520" y="1828800"/>
-            <a:ext cx="3328416" cy="4389120"/>
+            <a:off x="731520" y="1737360"/>
+            <a:ext cx="3328416" cy="4572000"/>
           </a:xfrm>
           <a:prstGeom prst="roundRect">
             <a:avLst/>
@@ -10487,20 +9838,20 @@
           <a:lstStyle/>
           <a:p>
             <a:pPr algn="ctr">
-              <a:defRPr sz="1400" b="1">
+              <a:defRPr sz="1500" b="1">
                 <a:solidFill>
                   <a:srgbClr val="241C1C"/>
                 </a:solidFill>
-                <a:latin typeface="The Seasons"/>
-              </a:defRPr>
-            </a:pPr>
-            <a:r>
-              <a:t>0/1 KNAPSACK (DP)</a:t>
-            </a:r>
-          </a:p>
-          <a:p>
-            <a:pPr>
-              <a:defRPr sz="900" b="1">
+                <a:latin typeface="Inter"/>
+              </a:defRPr>
+            </a:pPr>
+            <a:r>
+              <a:t>01. 0/1 KNAPSACK (DP)</a:t>
+            </a:r>
+          </a:p>
+          <a:p>
+            <a:pPr>
+              <a:defRPr sz="1100" b="1">
                 <a:solidFill>
                   <a:srgbClr val="E85923"/>
                 </a:solidFill>
@@ -10508,12 +9859,13 @@
               </a:defRPr>
             </a:pPr>
             <a:r>
-              <a:t>BELLMAN RECURRENCE • O(N · W)</a:t>
-            </a:r>
-          </a:p>
-          <a:p>
-            <a:pPr>
-              <a:defRPr sz="1000">
+              <a:t>BELLMAN RECURRENCE • O(n · W)</a:t>
+            </a:r>
+          </a:p>
+          <a:p>
+            <a:br/>
+            <a:pPr>
+              <a:defRPr sz="1200">
                 <a:solidFill>
                   <a:srgbClr val="241C1C"/>
                 </a:solidFill>
@@ -10534,15 +9886,19 @@
             <a:br/>
             <a:br/>
             <a:r>
-              <a:t>• Table Dimension: (N + 1) × (W + 1)</a:t>
+              <a:t>• Table Dimensions: (N + 1) × (W + 1)</a:t>
             </a:r>
             <a:br/>
             <a:r>
-              <a:t>• Backtracking extracts chosen orders by checking if DP[i][w] != DP[i-1][w].</a:t>
+              <a:t>• Cell decision: SKIP (item i excluded) vs TAKE (item i included).</a:t>
             </a:r>
             <a:br/>
             <a:r>
-              <a:t>• Theoretical Invariant: Guarantees 100% global optimal revenue capture.</a:t>
+              <a:t>• Golden Backtracking: Traces optimal parcel combination.</a:t>
+            </a:r>
+            <a:br/>
+            <a:r>
+              <a:t>• Invariant: Guarantees 100% global revenue capture.</a:t>
             </a:r>
           </a:p>
         </p:txBody>
@@ -10555,8 +9911,8 @@
         </p:nvSpPr>
         <p:spPr>
           <a:xfrm>
-            <a:off x="4425696" y="1828800"/>
-            <a:ext cx="3328416" cy="4389120"/>
+            <a:off x="4425696" y="1737360"/>
+            <a:ext cx="3328416" cy="4572000"/>
           </a:xfrm>
           <a:prstGeom prst="roundRect">
             <a:avLst/>
@@ -10589,20 +9945,20 @@
           <a:lstStyle/>
           <a:p>
             <a:pPr algn="ctr">
-              <a:defRPr sz="1400" b="1">
+              <a:defRPr sz="1500" b="1">
                 <a:solidFill>
                   <a:srgbClr val="241C1C"/>
                 </a:solidFill>
-                <a:latin typeface="The Seasons"/>
-              </a:defRPr>
-            </a:pPr>
-            <a:r>
-              <a:t>PROFIT DENSITY GREEDY</a:t>
-            </a:r>
-          </a:p>
-          <a:p>
-            <a:pPr>
-              <a:defRPr sz="900" b="1">
+                <a:latin typeface="Inter"/>
+              </a:defRPr>
+            </a:pPr>
+            <a:r>
+              <a:t>02. PROFIT DENSITY GREEDY</a:t>
+            </a:r>
+          </a:p>
+          <a:p>
+            <a:pPr>
+              <a:defRPr sz="1100" b="1">
                 <a:solidFill>
                   <a:srgbClr val="E85923"/>
                 </a:solidFill>
@@ -10610,12 +9966,13 @@
               </a:defRPr>
             </a:pPr>
             <a:r>
-              <a:t>DANTZIG RATIO SORT • O(N LOG N)</a:t>
-            </a:r>
-          </a:p>
-          <a:p>
-            <a:pPr>
-              <a:defRPr sz="1000">
+              <a:t>DANTZIG RATIO SORT • O(n log n)</a:t>
+            </a:r>
+          </a:p>
+          <a:p>
+            <a:br/>
+            <a:pPr>
+              <a:defRPr sz="1200">
                 <a:solidFill>
                   <a:srgbClr val="241C1C"/>
                 </a:solidFill>
@@ -10627,20 +9984,20 @@
             </a:r>
             <a:br/>
             <a:r>
-              <a:t>Sort orders by ratio r_i = p_i / w_i in descending order.</a:t>
+              <a:t>Calculate ratio r_i = p_i / w_i for each order.</a:t>
             </a:r>
             <a:br/>
             <a:r>
-              <a:t>Iteratively pick order if curr_weight + w_i &lt;= W.</a:t>
+              <a:t>Sort in descending order and greedily insert while weight &lt;= W.</a:t>
             </a:r>
             <a:br/>
             <a:br/>
             <a:r>
-              <a:t>• Why Greedy Fails discrete 0/1:</a:t>
+              <a:t>• Algorithmic Flaw:</a:t>
             </a:r>
             <a:br/>
             <a:r>
-              <a:t>Greedy choice property guarantees optimality only when parcels are divisible. For discrete items, packing voids waste capacity.</a:t>
+              <a:t>Greedy choice property guarantees optimality only when items are divisible. For discrete parcels, fractional voids waste valuable payload space.</a:t>
             </a:r>
           </a:p>
         </p:txBody>
@@ -10653,8 +10010,8 @@
         </p:nvSpPr>
         <p:spPr>
           <a:xfrm>
-            <a:off x="8119872" y="1828800"/>
-            <a:ext cx="3328416" cy="4389120"/>
+            <a:off x="8119872" y="1737360"/>
+            <a:ext cx="3328416" cy="4572000"/>
           </a:xfrm>
           <a:prstGeom prst="roundRect">
             <a:avLst/>
@@ -10687,20 +10044,20 @@
           <a:lstStyle/>
           <a:p>
             <a:pPr algn="ctr">
-              <a:defRPr sz="1400" b="1">
+              <a:defRPr sz="1500" b="1">
                 <a:solidFill>
                   <a:srgbClr val="241C1C"/>
                 </a:solidFill>
-                <a:latin typeface="The Seasons"/>
-              </a:defRPr>
-            </a:pPr>
-            <a:r>
-              <a:t>GREEDY HEURISTIC VARIANTS</a:t>
-            </a:r>
-          </a:p>
-          <a:p>
-            <a:pPr>
-              <a:defRPr sz="900" b="1">
+                <a:latin typeface="Inter"/>
+              </a:defRPr>
+            </a:pPr>
+            <a:r>
+              <a:t>03. ALTERNATIVE HEURISTICS</a:t>
+            </a:r>
+          </a:p>
+          <a:p>
+            <a:pPr>
+              <a:defRPr sz="1100" b="1">
                 <a:solidFill>
                   <a:srgbClr val="E85923"/>
                 </a:solidFill>
@@ -10708,12 +10065,13 @@
               </a:defRPr>
             </a:pPr>
             <a:r>
-              <a:t>PRIORITY CRITERIA COMPARISON</a:t>
-            </a:r>
-          </a:p>
-          <a:p>
-            <a:pPr>
-              <a:defRPr sz="1000">
+              <a:t>SLA &amp; BASELINE POLICIES</a:t>
+            </a:r>
+          </a:p>
+          <a:p>
+            <a:br/>
+            <a:pPr>
+              <a:defRPr sz="1200">
                 <a:solidFill>
                   <a:srgbClr val="241C1C"/>
                 </a:solidFill>
@@ -10721,32 +10079,28 @@
               </a:defRPr>
             </a:pPr>
             <a:r>
-              <a:t>Evaluated Three Alternative Policies:</a:t>
+              <a:t>Comparative Heuristic Strategies:</a:t>
             </a:r>
             <a:br/>
             <a:br/>
             <a:r>
-              <a:t>1. Profit Density: max (p_i / w_i)</a:t>
+              <a:t>1. Profit Density: max (p_i / w_i) — 92.4% Optimal.</a:t>
             </a:r>
             <a:br/>
             <a:r>
-              <a:t>   Fastest practical heuristic (0.4 ms).</a:t>
+              <a:t>2. Highest Profit: max p_i — 83.9% Optimal.</a:t>
             </a:r>
             <a:br/>
             <a:r>
-              <a:t>2. Highest Profit: max p_i</a:t>
+              <a:t>   Biased toward heavy orders, under-utilizing vehicle volume.</a:t>
             </a:r>
             <a:br/>
             <a:r>
-              <a:t>   Biased toward heavy items; low count.</a:t>
+              <a:t>3. Earliest Deadline First (EDF): min d_i — 85.7% Optimal.</a:t>
             </a:r>
             <a:br/>
             <a:r>
-              <a:t>3. Earliest Deadline: min d_i</a:t>
-            </a:r>
-            <a:br/>
-            <a:r>
-              <a:t>   Prioritizes urgent SLAs over total profit.</a:t>
+              <a:t>   Prioritizes urgent customer SLAs.</a:t>
             </a:r>
           </a:p>
         </p:txBody>
